--- a/technical_report/figures/swebench_evolution.pptx
+++ b/technical_report/figures/swebench_evolution.pptx
@@ -5112,7 +5112,7 @@
                 </a:solidFill>
                 <a:latin typeface="Aptos"/>
               </a:rPr>
-              <a:t>Task-mix shift</a:t>
+              <a:t>Composition shift</a:t>
             </a:r>
           </a:p>
         </p:txBody>
@@ -5484,7 +5484,7 @@
                 </a:solidFill>
                 <a:latin typeface="Aptos"/>
               </a:rPr>
-              <a:t>Hard tail</a:t>
+              <a:t>Late difficult tasks</a:t>
             </a:r>
           </a:p>
         </p:txBody>
@@ -6694,7 +6694,7 @@
                 </a:solidFill>
                 <a:latin typeface="Aptos"/>
               </a:rPr>
-              <a:t>Task-mix shift</a:t>
+              <a:t>Composition shift</a:t>
             </a:r>
           </a:p>
         </p:txBody>
@@ -7066,7 +7066,7 @@
                 </a:solidFill>
                 <a:latin typeface="Aptos"/>
               </a:rPr>
-              <a:t>Hard tail</a:t>
+              <a:t>Late difficult tasks</a:t>
             </a:r>
           </a:p>
         </p:txBody>
@@ -7114,8 +7114,8 @@
         </p:nvSpPr>
         <p:spPr>
           <a:xfrm>
-            <a:off x="6611112" y="4199015"/>
-            <a:ext cx="877824" cy="182880"/>
+            <a:off x="6528816" y="4199015"/>
+            <a:ext cx="1042415" cy="182880"/>
           </a:xfrm>
           <a:prstGeom prst="rect">
             <a:avLst/>
@@ -7130,13 +7130,13 @@
           <a:p>
             <a:pPr algn="ctr"/>
             <a:r>
-              <a:rPr sz="750" b="1">
+              <a:rPr sz="720" b="1">
                 <a:solidFill>
                   <a:srgbClr val="C38A20"/>
                 </a:solidFill>
                 <a:latin typeface="Aptos"/>
               </a:rPr>
-              <a:t>task-mix spike</a:t>
+              <a:t>composition shift</a:t>
             </a:r>
           </a:p>
         </p:txBody>
@@ -7171,7 +7171,7 @@
                 </a:solidFill>
                 <a:latin typeface="Aptos"/>
               </a:rPr>
-              <a:t>Task-weighted window means. W13 and W15 were deferred; W23–24 are retained as hard-tail stress. Queue, workspace/container, verifier, infrastructure-retry, and post-task maintenance time are excluded.</a:t>
+              <a:t>Task-weighted window means. Two incomplete Waves are omitted; W23–24 are shown separately as late difficult-task stress. Active time excludes orchestration wait, environment preparation, external verification, infrastructure recovery, and post-task knowledge maintenance.</a:t>
             </a:r>
           </a:p>
         </p:txBody>

--- a/technical_report/figures/swebench_evolution.pptx
+++ b/technical_report/figures/swebench_evolution.pptx
@@ -7,7 +7,7 @@
   <p:sldIdLst>
     <p:sldId id="256" r:id="rId7"/>
   </p:sldIdLst>
-  <p:sldSz cx="10972800" cy="6172200" type="screen4x3"/>
+  <p:sldSz cx="10972800" cy="4937760" type="screen4x3"/>
   <p:notesSz cx="6858000" cy="9144000"/>
   <p:defaultTextStyle>
     <a:defPPr>
@@ -3084,7 +3084,7 @@
     <p:bg>
       <p:bgPr>
         <a:solidFill>
-          <a:srgbClr val="FFFFFF"/>
+          <a:srgbClr val="FBF7EE"/>
         </a:solidFill>
         <a:effectLst/>
       </p:bgPr>
@@ -3096,16 +3096,445 @@
         <p:nvPr/>
       </p:nvGrpSpPr>
       <p:grpSpPr/>
-      <p:sp>
-        <p:nvSpPr>
-          <p:cNvPr id="2" name="Rectangle 1"/>
+      <p:pic>
+        <p:nvPicPr>
+          <p:cNvPr id="2" name="Picture 1" descr="mountain_strip.png"/>
+          <p:cNvPicPr>
+            <a:picLocks noChangeAspect="1"/>
+          </p:cNvPicPr>
+          <p:nvPr/>
+        </p:nvPicPr>
+        <p:blipFill>
+          <a:blip r:embed="rId2"/>
+          <a:stretch>
+            <a:fillRect/>
+          </a:stretch>
+        </p:blipFill>
+        <p:spPr>
+          <a:xfrm>
+            <a:off x="0" y="4681728"/>
+            <a:ext cx="10972800" cy="256032"/>
+          </a:xfrm>
+          <a:prstGeom prst="rect">
+            <a:avLst/>
+          </a:prstGeom>
+        </p:spPr>
+      </p:pic>
+      <p:sp>
+        <p:nvSpPr>
+          <p:cNvPr id="3" name="Rectangle 2"/>
           <p:cNvSpPr/>
           <p:nvPr/>
         </p:nvSpPr>
         <p:spPr>
           <a:xfrm>
             <a:off x="0" y="0"/>
-            <a:ext cx="10972800" cy="59436"/>
+            <a:ext cx="10972800" cy="50292"/>
+          </a:xfrm>
+          <a:prstGeom prst="rect">
+            <a:avLst/>
+          </a:prstGeom>
+          <a:solidFill>
+            <a:srgbClr val="24465D"/>
+          </a:solidFill>
+          <a:ln w="10160">
+            <a:solidFill>
+              <a:srgbClr val="24465D"/>
+            </a:solidFill>
+          </a:ln>
+          <a:effectLst/>
+        </p:spPr>
+        <p:style>
+          <a:lnRef idx="1">
+            <a:schemeClr val="accent1"/>
+          </a:lnRef>
+          <a:fillRef idx="3">
+            <a:schemeClr val="accent1"/>
+          </a:fillRef>
+          <a:effectRef idx="2">
+            <a:schemeClr val="accent1"/>
+          </a:effectRef>
+          <a:fontRef idx="minor">
+            <a:schemeClr val="lt1"/>
+          </a:fontRef>
+        </p:style>
+        <p:txBody>
+          <a:bodyPr rtlCol="0" anchor="ctr"/>
+          <a:lstStyle/>
+          <a:p>
+            <a:pPr algn="ctr"/>
+          </a:p>
+        </p:txBody>
+      </p:sp>
+      <p:sp>
+        <p:nvSpPr>
+          <p:cNvPr id="4" name="Rounded Rectangle 3"/>
+          <p:cNvSpPr/>
+          <p:nvPr/>
+        </p:nvSpPr>
+        <p:spPr>
+          <a:xfrm>
+            <a:off x="320040" y="228600"/>
+            <a:ext cx="2926080" cy="4434840"/>
+          </a:xfrm>
+          <a:prstGeom prst="roundRect">
+            <a:avLst/>
+          </a:prstGeom>
+          <a:solidFill>
+            <a:srgbClr val="FFFDF8"/>
+          </a:solidFill>
+          <a:ln w="10160">
+            <a:solidFill>
+              <a:srgbClr val="D8E0E8"/>
+            </a:solidFill>
+          </a:ln>
+          <a:effectLst/>
+        </p:spPr>
+        <p:style>
+          <a:lnRef idx="1">
+            <a:schemeClr val="accent1"/>
+          </a:lnRef>
+          <a:fillRef idx="3">
+            <a:schemeClr val="accent1"/>
+          </a:fillRef>
+          <a:effectRef idx="2">
+            <a:schemeClr val="accent1"/>
+          </a:effectRef>
+          <a:fontRef idx="minor">
+            <a:schemeClr val="lt1"/>
+          </a:fontRef>
+        </p:style>
+        <p:txBody>
+          <a:bodyPr rtlCol="0" anchor="ctr"/>
+          <a:lstStyle/>
+          <a:p>
+            <a:pPr algn="ctr"/>
+          </a:p>
+        </p:txBody>
+      </p:sp>
+      <p:sp>
+        <p:nvSpPr>
+          <p:cNvPr id="5" name="TextBox 4"/>
+          <p:cNvSpPr txBox="1"/>
+          <p:nvPr/>
+        </p:nvSpPr>
+        <p:spPr>
+          <a:xfrm>
+            <a:off x="484632" y="320040"/>
+            <a:ext cx="2377440" cy="292608"/>
+          </a:xfrm>
+          <a:prstGeom prst="rect">
+            <a:avLst/>
+          </a:prstGeom>
+          <a:noFill/>
+        </p:spPr>
+        <p:txBody>
+          <a:bodyPr wrap="none" lIns="18288" rIns="18288" tIns="18288" bIns="18288" anchor="ctr">
+            <a:spAutoFit/>
+          </a:bodyPr>
+          <a:lstStyle/>
+          <a:p>
+            <a:pPr algn="l"/>
+            <a:r>
+              <a:rPr sz="1150" b="1">
+                <a:solidFill>
+                  <a:srgbClr val="173B70"/>
+                </a:solidFill>
+                <a:latin typeface="Arial"/>
+              </a:rPr>
+              <a:t>(a) Outcome + review</a:t>
+            </a:r>
+          </a:p>
+        </p:txBody>
+      </p:sp>
+      <p:sp>
+        <p:nvSpPr>
+          <p:cNvPr id="6" name="TextBox 5"/>
+          <p:cNvSpPr txBox="1"/>
+          <p:nvPr/>
+        </p:nvSpPr>
+        <p:spPr>
+          <a:xfrm>
+            <a:off x="484632" y="685800"/>
+            <a:ext cx="2377440" cy="228600"/>
+          </a:xfrm>
+          <a:prstGeom prst="rect">
+            <a:avLst/>
+          </a:prstGeom>
+          <a:noFill/>
+        </p:spPr>
+        <p:txBody>
+          <a:bodyPr wrap="none" lIns="18288" rIns="18288" tIns="18288" bIns="18288" anchor="ctr">
+            <a:spAutoFit/>
+          </a:bodyPr>
+          <a:lstStyle/>
+          <a:p>
+            <a:pPr algn="l"/>
+            <a:r>
+              <a:rPr sz="1050" b="1">
+                <a:solidFill>
+                  <a:srgbClr val="24465D"/>
+                </a:solidFill>
+                <a:latin typeface="Arial"/>
+              </a:rPr>
+              <a:t>Accuracy · 731 tasks</a:t>
+            </a:r>
+          </a:p>
+        </p:txBody>
+      </p:sp>
+      <p:sp>
+        <p:nvSpPr>
+          <p:cNvPr id="7" name="TextBox 6"/>
+          <p:cNvSpPr txBox="1"/>
+          <p:nvPr/>
+        </p:nvSpPr>
+        <p:spPr>
+          <a:xfrm>
+            <a:off x="484632" y="786383"/>
+            <a:ext cx="1280160" cy="201168"/>
+          </a:xfrm>
+          <a:prstGeom prst="rect">
+            <a:avLst/>
+          </a:prstGeom>
+          <a:noFill/>
+        </p:spPr>
+        <p:txBody>
+          <a:bodyPr wrap="none" lIns="18288" rIns="18288" tIns="18288" bIns="18288" anchor="ctr">
+            <a:spAutoFit/>
+          </a:bodyPr>
+          <a:lstStyle/>
+          <a:p>
+            <a:pPr algn="l"/>
+            <a:r>
+              <a:rPr sz="869" b="0">
+                <a:solidFill>
+                  <a:srgbClr val="24465D"/>
+                </a:solidFill>
+                <a:latin typeface="Arial"/>
+              </a:rPr>
+              <a:t>Direct Copilot</a:t>
+            </a:r>
+          </a:p>
+        </p:txBody>
+      </p:sp>
+      <p:sp>
+        <p:nvSpPr>
+          <p:cNvPr id="8" name="Rectangle 7"/>
+          <p:cNvSpPr/>
+          <p:nvPr/>
+        </p:nvSpPr>
+        <p:spPr>
+          <a:xfrm>
+            <a:off x="484632" y="1033271"/>
+            <a:ext cx="2331720" cy="256032"/>
+          </a:xfrm>
+          <a:prstGeom prst="rect">
+            <a:avLst/>
+          </a:prstGeom>
+          <a:solidFill>
+            <a:srgbClr val="FFFDF8"/>
+          </a:solidFill>
+          <a:ln w="10160">
+            <a:solidFill>
+              <a:srgbClr val="D8E0E8"/>
+            </a:solidFill>
+          </a:ln>
+          <a:effectLst/>
+        </p:spPr>
+        <p:style>
+          <a:lnRef idx="1">
+            <a:schemeClr val="accent1"/>
+          </a:lnRef>
+          <a:fillRef idx="3">
+            <a:schemeClr val="accent1"/>
+          </a:fillRef>
+          <a:effectRef idx="2">
+            <a:schemeClr val="accent1"/>
+          </a:effectRef>
+          <a:fontRef idx="minor">
+            <a:schemeClr val="lt1"/>
+          </a:fontRef>
+        </p:style>
+        <p:txBody>
+          <a:bodyPr rtlCol="0" anchor="ctr"/>
+          <a:lstStyle/>
+          <a:p>
+            <a:pPr algn="ctr"/>
+          </a:p>
+        </p:txBody>
+      </p:sp>
+      <p:sp>
+        <p:nvSpPr>
+          <p:cNvPr id="9" name="Rectangle 8"/>
+          <p:cNvSpPr/>
+          <p:nvPr/>
+        </p:nvSpPr>
+        <p:spPr>
+          <a:xfrm>
+            <a:off x="484632" y="1033271"/>
+            <a:ext cx="1375714" cy="256032"/>
+          </a:xfrm>
+          <a:prstGeom prst="rect">
+            <a:avLst/>
+          </a:prstGeom>
+          <a:solidFill>
+            <a:srgbClr val="7A838E"/>
+          </a:solidFill>
+          <a:ln w="10160">
+            <a:solidFill>
+              <a:srgbClr val="7A838E"/>
+            </a:solidFill>
+          </a:ln>
+          <a:effectLst/>
+        </p:spPr>
+        <p:style>
+          <a:lnRef idx="1">
+            <a:schemeClr val="accent1"/>
+          </a:lnRef>
+          <a:fillRef idx="3">
+            <a:schemeClr val="accent1"/>
+          </a:fillRef>
+          <a:effectRef idx="2">
+            <a:schemeClr val="accent1"/>
+          </a:effectRef>
+          <a:fontRef idx="minor">
+            <a:schemeClr val="lt1"/>
+          </a:fontRef>
+        </p:style>
+        <p:txBody>
+          <a:bodyPr rtlCol="0" anchor="ctr"/>
+          <a:lstStyle/>
+          <a:p>
+            <a:pPr algn="ctr"/>
+          </a:p>
+        </p:txBody>
+      </p:sp>
+      <p:sp>
+        <p:nvSpPr>
+          <p:cNvPr id="10" name="TextBox 9"/>
+          <p:cNvSpPr txBox="1"/>
+          <p:nvPr/>
+        </p:nvSpPr>
+        <p:spPr>
+          <a:xfrm>
+            <a:off x="1293418" y="1024127"/>
+            <a:ext cx="512064" cy="256032"/>
+          </a:xfrm>
+          <a:prstGeom prst="rect">
+            <a:avLst/>
+          </a:prstGeom>
+          <a:noFill/>
+        </p:spPr>
+        <p:txBody>
+          <a:bodyPr wrap="none" lIns="18288" rIns="18288" tIns="18288" bIns="18288" anchor="ctr">
+            <a:spAutoFit/>
+          </a:bodyPr>
+          <a:lstStyle/>
+          <a:p>
+            <a:pPr algn="r"/>
+            <a:r>
+              <a:rPr sz="1000" b="1">
+                <a:solidFill>
+                  <a:srgbClr val="FFFDF8"/>
+                </a:solidFill>
+                <a:latin typeface="Arial"/>
+              </a:rPr>
+              <a:t>≈59%</a:t>
+            </a:r>
+          </a:p>
+        </p:txBody>
+      </p:sp>
+      <p:sp>
+        <p:nvSpPr>
+          <p:cNvPr id="11" name="TextBox 10"/>
+          <p:cNvSpPr txBox="1"/>
+          <p:nvPr/>
+        </p:nvSpPr>
+        <p:spPr>
+          <a:xfrm>
+            <a:off x="484632" y="1280160"/>
+            <a:ext cx="1280160" cy="201168"/>
+          </a:xfrm>
+          <a:prstGeom prst="rect">
+            <a:avLst/>
+          </a:prstGeom>
+          <a:noFill/>
+        </p:spPr>
+        <p:txBody>
+          <a:bodyPr wrap="none" lIns="18288" rIns="18288" tIns="18288" bIns="18288" anchor="ctr">
+            <a:spAutoFit/>
+          </a:bodyPr>
+          <a:lstStyle/>
+          <a:p>
+            <a:pPr algn="l"/>
+            <a:r>
+              <a:rPr sz="869" b="1">
+                <a:solidFill>
+                  <a:srgbClr val="24465D"/>
+                </a:solidFill>
+                <a:latin typeface="Arial"/>
+              </a:rPr>
+              <a:t>Argus</a:t>
+            </a:r>
+          </a:p>
+        </p:txBody>
+      </p:sp>
+      <p:sp>
+        <p:nvSpPr>
+          <p:cNvPr id="12" name="Rectangle 11"/>
+          <p:cNvSpPr/>
+          <p:nvPr/>
+        </p:nvSpPr>
+        <p:spPr>
+          <a:xfrm>
+            <a:off x="484632" y="1527048"/>
+            <a:ext cx="2331720" cy="256032"/>
+          </a:xfrm>
+          <a:prstGeom prst="rect">
+            <a:avLst/>
+          </a:prstGeom>
+          <a:solidFill>
+            <a:srgbClr val="FFFDF8"/>
+          </a:solidFill>
+          <a:ln w="10160">
+            <a:solidFill>
+              <a:srgbClr val="D8E0E8"/>
+            </a:solidFill>
+          </a:ln>
+          <a:effectLst/>
+        </p:spPr>
+        <p:style>
+          <a:lnRef idx="1">
+            <a:schemeClr val="accent1"/>
+          </a:lnRef>
+          <a:fillRef idx="3">
+            <a:schemeClr val="accent1"/>
+          </a:fillRef>
+          <a:effectRef idx="2">
+            <a:schemeClr val="accent1"/>
+          </a:effectRef>
+          <a:fontRef idx="minor">
+            <a:schemeClr val="lt1"/>
+          </a:fontRef>
+        </p:style>
+        <p:txBody>
+          <a:bodyPr rtlCol="0" anchor="ctr"/>
+          <a:lstStyle/>
+          <a:p>
+            <a:pPr algn="ctr"/>
+          </a:p>
+        </p:txBody>
+      </p:sp>
+      <p:sp>
+        <p:nvSpPr>
+          <p:cNvPr id="13" name="Rectangle 12"/>
+          <p:cNvSpPr/>
+          <p:nvPr/>
+        </p:nvSpPr>
+        <p:spPr>
+          <a:xfrm>
+            <a:off x="484632" y="1527048"/>
+            <a:ext cx="1818741" cy="256032"/>
           </a:xfrm>
           <a:prstGeom prst="rect">
             <a:avLst/>
@@ -3144,14 +3573,14 @@
       </p:sp>
       <p:sp>
         <p:nvSpPr>
-          <p:cNvPr id="3" name="TextBox 2"/>
+          <p:cNvPr id="14" name="TextBox 13"/>
           <p:cNvSpPr txBox="1"/>
           <p:nvPr/>
         </p:nvSpPr>
         <p:spPr>
           <a:xfrm>
-            <a:off x="320040" y="182880"/>
-            <a:ext cx="10241280" cy="384048"/>
+            <a:off x="1736445" y="1517904"/>
+            <a:ext cx="512064" cy="256032"/>
           </a:xfrm>
           <a:prstGeom prst="rect">
             <a:avLst/>
@@ -3164,74 +3593,39 @@
           </a:bodyPr>
           <a:lstStyle/>
           <a:p>
-            <a:pPr algn="l"/>
-            <a:r>
-              <a:rPr sz="2000" b="1">
-                <a:solidFill>
-                  <a:srgbClr val="1E2732"/>
-                </a:solidFill>
-                <a:latin typeface="Aptos"/>
+            <a:pPr algn="r"/>
+            <a:r>
+              <a:rPr sz="1000" b="1">
+                <a:solidFill>
+                  <a:srgbClr val="FFFDF8"/>
+                </a:solidFill>
+                <a:latin typeface="Arial"/>
               </a:rPr>
-              <a:t>SWE-Bench Pro: accuracy gain and runtime convergence</a:t>
-            </a:r>
-          </a:p>
-        </p:txBody>
-      </p:sp>
-      <p:sp>
-        <p:nvSpPr>
-          <p:cNvPr id="4" name="TextBox 3"/>
-          <p:cNvSpPr txBox="1"/>
-          <p:nvPr/>
-        </p:nvSpPr>
-        <p:spPr>
-          <a:xfrm>
-            <a:off x="338328" y="585216"/>
-            <a:ext cx="10149840" cy="256032"/>
-          </a:xfrm>
-          <a:prstGeom prst="rect">
-            <a:avLst/>
-          </a:prstGeom>
-          <a:noFill/>
-        </p:spPr>
-        <p:txBody>
-          <a:bodyPr wrap="none" lIns="18288" rIns="18288" tIns="18288" bIns="18288" anchor="ctr">
-            <a:spAutoFit/>
-          </a:bodyPr>
-          <a:lstStyle/>
-          <a:p>
-            <a:pPr algn="l"/>
-            <a:r>
-              <a:rPr sz="950" b="0">
-                <a:solidFill>
-                  <a:srgbClr val="5E6875"/>
-                </a:solidFill>
-                <a:latin typeface="Aptos"/>
-              </a:rPr>
-              <a:t>One continuous 731-task evaluation · GPT-5.5/xhigh · Skill and Wiki state updated throughout the run</a:t>
-            </a:r>
-          </a:p>
-        </p:txBody>
-      </p:sp>
-      <p:sp>
-        <p:nvSpPr>
-          <p:cNvPr id="5" name="Rounded Rectangle 4"/>
+              <a:t>≈78%</a:t>
+            </a:r>
+          </a:p>
+        </p:txBody>
+      </p:sp>
+      <p:sp>
+        <p:nvSpPr>
+          <p:cNvPr id="15" name="Rounded Rectangle 14"/>
           <p:cNvSpPr/>
           <p:nvPr/>
         </p:nvSpPr>
         <p:spPr>
           <a:xfrm>
-            <a:off x="320040" y="1051560"/>
-            <a:ext cx="2926080" cy="4663440"/>
+            <a:off x="484632" y="1929384"/>
+            <a:ext cx="1133856" cy="475488"/>
           </a:xfrm>
           <a:prstGeom prst="roundRect">
             <a:avLst/>
           </a:prstGeom>
           <a:solidFill>
-            <a:srgbClr val="F8FAFC"/>
+            <a:srgbClr val="E8EEFC"/>
           </a:solidFill>
           <a:ln w="10160">
             <a:solidFill>
-              <a:srgbClr val="DBE1E7"/>
+              <a:srgbClr val="A6BCEB"/>
             </a:solidFill>
           </a:ln>
           <a:effectLst/>
@@ -3260,14 +3654,14 @@
       </p:sp>
       <p:sp>
         <p:nvSpPr>
-          <p:cNvPr id="6" name="TextBox 5"/>
+          <p:cNvPr id="16" name="TextBox 15"/>
           <p:cNvSpPr txBox="1"/>
           <p:nvPr/>
         </p:nvSpPr>
         <p:spPr>
           <a:xfrm>
-            <a:off x="484632" y="1143000"/>
-            <a:ext cx="2560320" cy="292608"/>
+            <a:off x="539496" y="1993391"/>
+            <a:ext cx="1024128" cy="320040"/>
           </a:xfrm>
           <a:prstGeom prst="rect">
             <a:avLst/>
@@ -3280,109 +3674,39 @@
           </a:bodyPr>
           <a:lstStyle/>
           <a:p>
-            <a:pPr algn="l"/>
-            <a:r>
-              <a:rPr sz="1200" b="1">
-                <a:solidFill>
-                  <a:srgbClr val="173B70"/>
-                </a:solidFill>
-                <a:latin typeface="Aptos"/>
+            <a:pPr algn="ctr"/>
+            <a:r>
+              <a:rPr sz="1400" b="1">
+                <a:solidFill>
+                  <a:srgbClr val="315BCE"/>
+                </a:solidFill>
+                <a:latin typeface="Arial"/>
               </a:rPr>
-              <a:t>(a) Full-suite comparison</a:t>
-            </a:r>
-          </a:p>
-        </p:txBody>
-      </p:sp>
-      <p:sp>
-        <p:nvSpPr>
-          <p:cNvPr id="7" name="TextBox 6"/>
-          <p:cNvSpPr txBox="1"/>
-          <p:nvPr/>
-        </p:nvSpPr>
-        <p:spPr>
-          <a:xfrm>
-            <a:off x="484632" y="1536192"/>
-            <a:ext cx="2377440" cy="228600"/>
-          </a:xfrm>
-          <a:prstGeom prst="rect">
-            <a:avLst/>
-          </a:prstGeom>
-          <a:noFill/>
-        </p:spPr>
-        <p:txBody>
-          <a:bodyPr wrap="none" lIns="18288" rIns="18288" tIns="18288" bIns="18288" anchor="ctr">
-            <a:spAutoFit/>
-          </a:bodyPr>
-          <a:lstStyle/>
-          <a:p>
-            <a:pPr algn="l"/>
-            <a:r>
-              <a:rPr sz="950" b="1">
-                <a:solidFill>
-                  <a:srgbClr val="1E2732"/>
-                </a:solidFill>
-                <a:latin typeface="Aptos"/>
-              </a:rPr>
-              <a:t>Accuracy on 731 tasks</a:t>
-            </a:r>
-          </a:p>
-        </p:txBody>
-      </p:sp>
-      <p:sp>
-        <p:nvSpPr>
-          <p:cNvPr id="8" name="TextBox 7"/>
-          <p:cNvSpPr txBox="1"/>
-          <p:nvPr/>
-        </p:nvSpPr>
-        <p:spPr>
-          <a:xfrm>
-            <a:off x="484632" y="1627631"/>
-            <a:ext cx="1280160" cy="201168"/>
-          </a:xfrm>
-          <a:prstGeom prst="rect">
-            <a:avLst/>
-          </a:prstGeom>
-          <a:noFill/>
-        </p:spPr>
-        <p:txBody>
-          <a:bodyPr wrap="none" lIns="18288" rIns="18288" tIns="18288" bIns="18288" anchor="ctr">
-            <a:spAutoFit/>
-          </a:bodyPr>
-          <a:lstStyle/>
-          <a:p>
-            <a:pPr algn="l"/>
-            <a:r>
-              <a:rPr sz="869" b="0">
-                <a:solidFill>
-                  <a:srgbClr val="1E2732"/>
-                </a:solidFill>
-                <a:latin typeface="Aptos"/>
-              </a:rPr>
-              <a:t>Direct Copilot</a:t>
-            </a:r>
-          </a:p>
-        </p:txBody>
-      </p:sp>
-      <p:sp>
-        <p:nvSpPr>
-          <p:cNvPr id="9" name="Rectangle 8"/>
+              <a:t>+19 pp</a:t>
+            </a:r>
+          </a:p>
+        </p:txBody>
+      </p:sp>
+      <p:sp>
+        <p:nvSpPr>
+          <p:cNvPr id="17" name="Rounded Rectangle 16"/>
           <p:cNvSpPr/>
           <p:nvPr/>
         </p:nvSpPr>
         <p:spPr>
           <a:xfrm>
-            <a:off x="484632" y="1874519"/>
-            <a:ext cx="2331720" cy="256032"/>
-          </a:xfrm>
-          <a:prstGeom prst="rect">
+            <a:off x="1737360" y="1929384"/>
+            <a:ext cx="1133856" cy="475488"/>
+          </a:xfrm>
+          <a:prstGeom prst="roundRect">
             <a:avLst/>
           </a:prstGeom>
           <a:solidFill>
-            <a:srgbClr val="FFFFFF"/>
+            <a:srgbClr val="FCF6E5"/>
           </a:solidFill>
           <a:ln w="10160">
             <a:solidFill>
-              <a:srgbClr val="DBE1E7"/>
+              <a:srgbClr val="C38A20"/>
             </a:solidFill>
           </a:ln>
           <a:effectLst/>
@@ -3411,14 +3735,211 @@
       </p:sp>
       <p:sp>
         <p:nvSpPr>
-          <p:cNvPr id="10" name="Rectangle 9"/>
+          <p:cNvPr id="18" name="TextBox 17"/>
+          <p:cNvSpPr txBox="1"/>
+          <p:nvPr/>
+        </p:nvSpPr>
+        <p:spPr>
+          <a:xfrm>
+            <a:off x="1792224" y="1993391"/>
+            <a:ext cx="1024128" cy="320040"/>
+          </a:xfrm>
+          <a:prstGeom prst="rect">
+            <a:avLst/>
+          </a:prstGeom>
+          <a:noFill/>
+        </p:spPr>
+        <p:txBody>
+          <a:bodyPr wrap="none" lIns="18288" rIns="18288" tIns="18288" bIns="18288" anchor="ctr">
+            <a:spAutoFit/>
+          </a:bodyPr>
+          <a:lstStyle/>
+          <a:p>
+            <a:pPr algn="ctr"/>
+            <a:r>
+              <a:rPr sz="1250" b="1">
+                <a:solidFill>
+                  <a:srgbClr val="C38A20"/>
+                </a:solidFill>
+                <a:latin typeface="Arial"/>
+              </a:rPr>
+              <a:t>1.41× tokens</a:t>
+            </a:r>
+          </a:p>
+        </p:txBody>
+      </p:sp>
+      <p:cxnSp>
+        <p:nvCxnSpPr>
+          <p:cNvPr id="19" name="Connector 18"/>
+          <p:cNvCxnSpPr/>
+          <p:nvPr/>
+        </p:nvCxnSpPr>
+        <p:spPr>
+          <a:xfrm>
+            <a:off x="484632" y="2560320"/>
+            <a:ext cx="2596896" cy="0"/>
+          </a:xfrm>
+          <a:prstGeom prst="line">
+            <a:avLst/>
+          </a:prstGeom>
+          <a:ln w="10160">
+            <a:solidFill>
+              <a:srgbClr val="D8E0E8"/>
+            </a:solidFill>
+          </a:ln>
+        </p:spPr>
+        <p:style>
+          <a:lnRef idx="2">
+            <a:schemeClr val="accent1"/>
+          </a:lnRef>
+          <a:fillRef idx="0">
+            <a:schemeClr val="accent1"/>
+          </a:fillRef>
+          <a:effectRef idx="1">
+            <a:schemeClr val="accent1"/>
+          </a:effectRef>
+          <a:fontRef idx="minor">
+            <a:schemeClr val="tx1"/>
+          </a:fontRef>
+        </p:style>
+      </p:cxnSp>
+      <p:sp>
+        <p:nvSpPr>
+          <p:cNvPr id="20" name="TextBox 19"/>
+          <p:cNvSpPr txBox="1"/>
+          <p:nvPr/>
+        </p:nvSpPr>
+        <p:spPr>
+          <a:xfrm>
+            <a:off x="484632" y="2679192"/>
+            <a:ext cx="2377440" cy="228600"/>
+          </a:xfrm>
+          <a:prstGeom prst="rect">
+            <a:avLst/>
+          </a:prstGeom>
+          <a:noFill/>
+        </p:spPr>
+        <p:txBody>
+          <a:bodyPr wrap="none" lIns="18288" rIns="18288" tIns="18288" bIns="18288" anchor="ctr">
+            <a:spAutoFit/>
+          </a:bodyPr>
+          <a:lstStyle/>
+          <a:p>
+            <a:pPr algn="l"/>
+            <a:r>
+              <a:rPr sz="1050" b="1">
+                <a:solidFill>
+                  <a:srgbClr val="24465D"/>
+                </a:solidFill>
+                <a:latin typeface="Arial"/>
+              </a:rPr>
+              <a:t>Reviewer routing</a:t>
+            </a:r>
+          </a:p>
+        </p:txBody>
+      </p:sp>
+      <p:sp>
+        <p:nvSpPr>
+          <p:cNvPr id="21" name="Rectangle 20"/>
           <p:cNvSpPr/>
           <p:nvPr/>
         </p:nvSpPr>
         <p:spPr>
           <a:xfrm>
-            <a:off x="484632" y="1874519"/>
-            <a:ext cx="1375714" cy="256032"/>
+            <a:off x="484632" y="2953512"/>
+            <a:ext cx="2331720" cy="256032"/>
+          </a:xfrm>
+          <a:prstGeom prst="rect">
+            <a:avLst/>
+          </a:prstGeom>
+          <a:solidFill>
+            <a:srgbClr val="FFFDF8"/>
+          </a:solidFill>
+          <a:ln w="10160">
+            <a:solidFill>
+              <a:srgbClr val="D8E0E8"/>
+            </a:solidFill>
+          </a:ln>
+          <a:effectLst/>
+        </p:spPr>
+        <p:style>
+          <a:lnRef idx="1">
+            <a:schemeClr val="accent1"/>
+          </a:lnRef>
+          <a:fillRef idx="3">
+            <a:schemeClr val="accent1"/>
+          </a:fillRef>
+          <a:effectRef idx="2">
+            <a:schemeClr val="accent1"/>
+          </a:effectRef>
+          <a:fontRef idx="minor">
+            <a:schemeClr val="lt1"/>
+          </a:fontRef>
+        </p:style>
+        <p:txBody>
+          <a:bodyPr rtlCol="0" anchor="ctr"/>
+          <a:lstStyle/>
+          <a:p>
+            <a:pPr algn="ctr"/>
+          </a:p>
+        </p:txBody>
+      </p:sp>
+      <p:sp>
+        <p:nvSpPr>
+          <p:cNvPr id="22" name="Rectangle 21"/>
+          <p:cNvSpPr/>
+          <p:nvPr/>
+        </p:nvSpPr>
+        <p:spPr>
+          <a:xfrm>
+            <a:off x="484632" y="2953512"/>
+            <a:ext cx="1486431" cy="256032"/>
+          </a:xfrm>
+          <a:prstGeom prst="rect">
+            <a:avLst/>
+          </a:prstGeom>
+          <a:solidFill>
+            <a:srgbClr val="315BCE"/>
+          </a:solidFill>
+          <a:ln w="10160">
+            <a:solidFill>
+              <a:srgbClr val="315BCE"/>
+            </a:solidFill>
+          </a:ln>
+          <a:effectLst/>
+        </p:spPr>
+        <p:style>
+          <a:lnRef idx="1">
+            <a:schemeClr val="accent1"/>
+          </a:lnRef>
+          <a:fillRef idx="3">
+            <a:schemeClr val="accent1"/>
+          </a:fillRef>
+          <a:effectRef idx="2">
+            <a:schemeClr val="accent1"/>
+          </a:effectRef>
+          <a:fontRef idx="minor">
+            <a:schemeClr val="lt1"/>
+          </a:fontRef>
+        </p:style>
+        <p:txBody>
+          <a:bodyPr rtlCol="0" anchor="ctr"/>
+          <a:lstStyle/>
+          <a:p>
+            <a:pPr algn="ctr"/>
+          </a:p>
+        </p:txBody>
+      </p:sp>
+      <p:sp>
+        <p:nvSpPr>
+          <p:cNvPr id="23" name="Rectangle 22"/>
+          <p:cNvSpPr/>
+          <p:nvPr/>
+        </p:nvSpPr>
+        <p:spPr>
+          <a:xfrm>
+            <a:off x="1971063" y="2953512"/>
+            <a:ext cx="845288" cy="256032"/>
           </a:xfrm>
           <a:prstGeom prst="rect">
             <a:avLst/>
@@ -3457,14 +3978,14 @@
       </p:sp>
       <p:sp>
         <p:nvSpPr>
-          <p:cNvPr id="11" name="TextBox 10"/>
+          <p:cNvPr id="24" name="TextBox 23"/>
           <p:cNvSpPr txBox="1"/>
           <p:nvPr/>
         </p:nvSpPr>
         <p:spPr>
           <a:xfrm>
-            <a:off x="1293418" y="1865376"/>
-            <a:ext cx="512064" cy="256032"/>
+            <a:off x="530352" y="2953512"/>
+            <a:ext cx="1394991" cy="256032"/>
           </a:xfrm>
           <a:prstGeom prst="rect">
             <a:avLst/>
@@ -3477,29 +3998,29 @@
           </a:bodyPr>
           <a:lstStyle/>
           <a:p>
-            <a:pPr algn="r"/>
-            <a:r>
-              <a:rPr sz="1000" b="1">
-                <a:solidFill>
-                  <a:srgbClr val="FFFFFF"/>
-                </a:solidFill>
-                <a:latin typeface="Aptos"/>
+            <a:pPr algn="l"/>
+            <a:r>
+              <a:rPr sz="850" b="1">
+                <a:solidFill>
+                  <a:srgbClr val="FFFDF8"/>
+                </a:solidFill>
+                <a:latin typeface="Arial"/>
               </a:rPr>
-              <a:t>≈59%</a:t>
-            </a:r>
-          </a:p>
-        </p:txBody>
-      </p:sp>
-      <p:sp>
-        <p:nvSpPr>
-          <p:cNvPr id="12" name="TextBox 11"/>
+              <a:t>466 Reviewer</a:t>
+            </a:r>
+          </a:p>
+        </p:txBody>
+      </p:sp>
+      <p:sp>
+        <p:nvSpPr>
+          <p:cNvPr id="25" name="TextBox 24"/>
           <p:cNvSpPr txBox="1"/>
           <p:nvPr/>
         </p:nvSpPr>
         <p:spPr>
           <a:xfrm>
-            <a:off x="484632" y="2221992"/>
-            <a:ext cx="1280160" cy="201168"/>
+            <a:off x="1971063" y="2953512"/>
+            <a:ext cx="808712" cy="256032"/>
           </a:xfrm>
           <a:prstGeom prst="rect">
             <a:avLst/>
@@ -3512,39 +4033,109 @@
           </a:bodyPr>
           <a:lstStyle/>
           <a:p>
+            <a:pPr algn="ctr"/>
+            <a:r>
+              <a:rPr sz="819" b="1">
+                <a:solidFill>
+                  <a:srgbClr val="FFFDF8"/>
+                </a:solidFill>
+                <a:latin typeface="Arial"/>
+              </a:rPr>
+              <a:t>265 self</a:t>
+            </a:r>
+          </a:p>
+        </p:txBody>
+      </p:sp>
+      <p:sp>
+        <p:nvSpPr>
+          <p:cNvPr id="26" name="TextBox 25"/>
+          <p:cNvSpPr txBox="1"/>
+          <p:nvPr/>
+        </p:nvSpPr>
+        <p:spPr>
+          <a:xfrm>
+            <a:off x="484632" y="3282696"/>
+            <a:ext cx="2596896" cy="228600"/>
+          </a:xfrm>
+          <a:prstGeom prst="rect">
+            <a:avLst/>
+          </a:prstGeom>
+          <a:noFill/>
+        </p:spPr>
+        <p:txBody>
+          <a:bodyPr wrap="none" lIns="18288" rIns="18288" tIns="18288" bIns="18288" anchor="ctr">
+            <a:spAutoFit/>
+          </a:bodyPr>
+          <a:lstStyle/>
+          <a:p>
+            <a:pPr algn="ctr"/>
+            <a:r>
+              <a:rPr sz="869" b="1">
+                <a:solidFill>
+                  <a:srgbClr val="173B70"/>
+                </a:solidFill>
+                <a:latin typeface="Arial"/>
+              </a:rPr>
+              <a:t>routed workload · 2.75× tokens · 1.80× time</a:t>
+            </a:r>
+          </a:p>
+        </p:txBody>
+      </p:sp>
+      <p:sp>
+        <p:nvSpPr>
+          <p:cNvPr id="27" name="TextBox 26"/>
+          <p:cNvSpPr txBox="1"/>
+          <p:nvPr/>
+        </p:nvSpPr>
+        <p:spPr>
+          <a:xfrm>
+            <a:off x="484632" y="3593592"/>
+            <a:ext cx="2377440" cy="219456"/>
+          </a:xfrm>
+          <a:prstGeom prst="rect">
+            <a:avLst/>
+          </a:prstGeom>
+          <a:noFill/>
+        </p:spPr>
+        <p:txBody>
+          <a:bodyPr wrap="none" lIns="18288" rIns="18288" tIns="18288" bIns="18288" anchor="ctr">
+            <a:spAutoFit/>
+          </a:bodyPr>
+          <a:lstStyle/>
+          <a:p>
             <a:pPr algn="l"/>
             <a:r>
-              <a:rPr sz="869" b="1">
-                <a:solidFill>
-                  <a:srgbClr val="1E2732"/>
-                </a:solidFill>
-                <a:latin typeface="Aptos"/>
+              <a:rPr sz="1050" b="1">
+                <a:solidFill>
+                  <a:srgbClr val="24465D"/>
+                </a:solidFill>
+                <a:latin typeface="Arial"/>
               </a:rPr>
-              <a:t>Argus</a:t>
-            </a:r>
-          </a:p>
-        </p:txBody>
-      </p:sp>
-      <p:sp>
-        <p:nvSpPr>
-          <p:cNvPr id="13" name="Rectangle 12"/>
+              <a:t>Review outcomes</a:t>
+            </a:r>
+          </a:p>
+        </p:txBody>
+      </p:sp>
+      <p:sp>
+        <p:nvSpPr>
+          <p:cNvPr id="28" name="Rounded Rectangle 27"/>
           <p:cNvSpPr/>
           <p:nvPr/>
         </p:nvSpPr>
         <p:spPr>
           <a:xfrm>
-            <a:off x="484632" y="2468880"/>
-            <a:ext cx="2331720" cy="256032"/>
-          </a:xfrm>
-          <a:prstGeom prst="rect">
+            <a:off x="484632" y="3849624"/>
+            <a:ext cx="658368" cy="438912"/>
+          </a:xfrm>
+          <a:prstGeom prst="roundRect">
             <a:avLst/>
           </a:prstGeom>
           <a:solidFill>
-            <a:srgbClr val="FFFFFF"/>
+            <a:srgbClr val="E8EEFC"/>
           </a:solidFill>
           <a:ln w="10160">
             <a:solidFill>
-              <a:srgbClr val="DBE1E7"/>
+              <a:srgbClr val="173B70"/>
             </a:solidFill>
           </a:ln>
           <a:effectLst/>
@@ -3573,20 +4164,392 @@
       </p:sp>
       <p:sp>
         <p:nvSpPr>
-          <p:cNvPr id="14" name="Rectangle 13"/>
+          <p:cNvPr id="29" name="TextBox 28"/>
+          <p:cNvSpPr txBox="1"/>
+          <p:nvPr/>
+        </p:nvSpPr>
+        <p:spPr>
+          <a:xfrm>
+            <a:off x="521208" y="3877056"/>
+            <a:ext cx="585216" cy="219456"/>
+          </a:xfrm>
+          <a:prstGeom prst="rect">
+            <a:avLst/>
+          </a:prstGeom>
+          <a:noFill/>
+        </p:spPr>
+        <p:txBody>
+          <a:bodyPr wrap="none" lIns="18288" rIns="18288" tIns="18288" bIns="18288" anchor="ctr">
+            <a:spAutoFit/>
+          </a:bodyPr>
+          <a:lstStyle/>
+          <a:p>
+            <a:pPr algn="ctr"/>
+            <a:r>
+              <a:rPr sz="1200" b="1">
+                <a:solidFill>
+                  <a:srgbClr val="173B70"/>
+                </a:solidFill>
+                <a:latin typeface="Arial"/>
+              </a:rPr>
+              <a:t>388</a:t>
+            </a:r>
+          </a:p>
+        </p:txBody>
+      </p:sp>
+      <p:sp>
+        <p:nvSpPr>
+          <p:cNvPr id="30" name="TextBox 29"/>
+          <p:cNvSpPr txBox="1"/>
+          <p:nvPr/>
+        </p:nvSpPr>
+        <p:spPr>
+          <a:xfrm>
+            <a:off x="512064" y="4078224"/>
+            <a:ext cx="603504" cy="146304"/>
+          </a:xfrm>
+          <a:prstGeom prst="rect">
+            <a:avLst/>
+          </a:prstGeom>
+          <a:noFill/>
+        </p:spPr>
+        <p:txBody>
+          <a:bodyPr wrap="none" lIns="18288" rIns="18288" tIns="18288" bIns="18288" anchor="ctr">
+            <a:spAutoFit/>
+          </a:bodyPr>
+          <a:lstStyle/>
+          <a:p>
+            <a:pPr algn="ctr"/>
+            <a:r>
+              <a:rPr sz="730" b="0">
+                <a:solidFill>
+                  <a:srgbClr val="66717D"/>
+                </a:solidFill>
+                <a:latin typeface="Arial"/>
+              </a:rPr>
+              <a:t>first-pass</a:t>
+            </a:r>
+          </a:p>
+        </p:txBody>
+      </p:sp>
+      <p:sp>
+        <p:nvSpPr>
+          <p:cNvPr id="31" name="Rounded Rectangle 30"/>
           <p:cNvSpPr/>
           <p:nvPr/>
         </p:nvSpPr>
         <p:spPr>
           <a:xfrm>
-            <a:off x="484632" y="2468880"/>
-            <a:ext cx="1818741" cy="256032"/>
+            <a:off x="1307592" y="3849624"/>
+            <a:ext cx="658368" cy="438912"/>
+          </a:xfrm>
+          <a:prstGeom prst="roundRect">
+            <a:avLst/>
+          </a:prstGeom>
+          <a:solidFill>
+            <a:srgbClr val="FCF6E5"/>
+          </a:solidFill>
+          <a:ln w="10160">
+            <a:solidFill>
+              <a:srgbClr val="C38A20"/>
+            </a:solidFill>
+          </a:ln>
+          <a:effectLst/>
+        </p:spPr>
+        <p:style>
+          <a:lnRef idx="1">
+            <a:schemeClr val="accent1"/>
+          </a:lnRef>
+          <a:fillRef idx="3">
+            <a:schemeClr val="accent1"/>
+          </a:fillRef>
+          <a:effectRef idx="2">
+            <a:schemeClr val="accent1"/>
+          </a:effectRef>
+          <a:fontRef idx="minor">
+            <a:schemeClr val="lt1"/>
+          </a:fontRef>
+        </p:style>
+        <p:txBody>
+          <a:bodyPr rtlCol="0" anchor="ctr"/>
+          <a:lstStyle/>
+          <a:p>
+            <a:pPr algn="ctr"/>
+          </a:p>
+        </p:txBody>
+      </p:sp>
+      <p:sp>
+        <p:nvSpPr>
+          <p:cNvPr id="32" name="TextBox 31"/>
+          <p:cNvSpPr txBox="1"/>
+          <p:nvPr/>
+        </p:nvSpPr>
+        <p:spPr>
+          <a:xfrm>
+            <a:off x="1344168" y="3877056"/>
+            <a:ext cx="585216" cy="219456"/>
           </a:xfrm>
           <a:prstGeom prst="rect">
             <a:avLst/>
           </a:prstGeom>
+          <a:noFill/>
+        </p:spPr>
+        <p:txBody>
+          <a:bodyPr wrap="none" lIns="18288" rIns="18288" tIns="18288" bIns="18288" anchor="ctr">
+            <a:spAutoFit/>
+          </a:bodyPr>
+          <a:lstStyle/>
+          <a:p>
+            <a:pPr algn="ctr"/>
+            <a:r>
+              <a:rPr sz="1200" b="1">
+                <a:solidFill>
+                  <a:srgbClr val="C38A20"/>
+                </a:solidFill>
+                <a:latin typeface="Arial"/>
+              </a:rPr>
+              <a:t>43</a:t>
+            </a:r>
+          </a:p>
+        </p:txBody>
+      </p:sp>
+      <p:sp>
+        <p:nvSpPr>
+          <p:cNvPr id="33" name="TextBox 32"/>
+          <p:cNvSpPr txBox="1"/>
+          <p:nvPr/>
+        </p:nvSpPr>
+        <p:spPr>
+          <a:xfrm>
+            <a:off x="1335024" y="4078224"/>
+            <a:ext cx="603504" cy="146304"/>
+          </a:xfrm>
+          <a:prstGeom prst="rect">
+            <a:avLst/>
+          </a:prstGeom>
+          <a:noFill/>
+        </p:spPr>
+        <p:txBody>
+          <a:bodyPr wrap="none" lIns="18288" rIns="18288" tIns="18288" bIns="18288" anchor="ctr">
+            <a:spAutoFit/>
+          </a:bodyPr>
+          <a:lstStyle/>
+          <a:p>
+            <a:pPr algn="ctr"/>
+            <a:r>
+              <a:rPr sz="730" b="0">
+                <a:solidFill>
+                  <a:srgbClr val="66717D"/>
+                </a:solidFill>
+                <a:latin typeface="Arial"/>
+              </a:rPr>
+              <a:t>revise</a:t>
+            </a:r>
+          </a:p>
+        </p:txBody>
+      </p:sp>
+      <p:sp>
+        <p:nvSpPr>
+          <p:cNvPr id="34" name="Rounded Rectangle 33"/>
+          <p:cNvSpPr/>
+          <p:nvPr/>
+        </p:nvSpPr>
+        <p:spPr>
+          <a:xfrm>
+            <a:off x="2130552" y="3849624"/>
+            <a:ext cx="658368" cy="438912"/>
+          </a:xfrm>
+          <a:prstGeom prst="roundRect">
+            <a:avLst/>
+          </a:prstGeom>
           <a:solidFill>
-            <a:srgbClr val="315BCE"/>
+            <a:srgbClr val="FFFDF8"/>
+          </a:solidFill>
+          <a:ln w="10160">
+            <a:solidFill>
+              <a:srgbClr val="7A838E"/>
+            </a:solidFill>
+          </a:ln>
+          <a:effectLst/>
+        </p:spPr>
+        <p:style>
+          <a:lnRef idx="1">
+            <a:schemeClr val="accent1"/>
+          </a:lnRef>
+          <a:fillRef idx="3">
+            <a:schemeClr val="accent1"/>
+          </a:fillRef>
+          <a:effectRef idx="2">
+            <a:schemeClr val="accent1"/>
+          </a:effectRef>
+          <a:fontRef idx="minor">
+            <a:schemeClr val="lt1"/>
+          </a:fontRef>
+        </p:style>
+        <p:txBody>
+          <a:bodyPr rtlCol="0" anchor="ctr"/>
+          <a:lstStyle/>
+          <a:p>
+            <a:pPr algn="ctr"/>
+          </a:p>
+        </p:txBody>
+      </p:sp>
+      <p:sp>
+        <p:nvSpPr>
+          <p:cNvPr id="35" name="TextBox 34"/>
+          <p:cNvSpPr txBox="1"/>
+          <p:nvPr/>
+        </p:nvSpPr>
+        <p:spPr>
+          <a:xfrm>
+            <a:off x="2167128" y="3877056"/>
+            <a:ext cx="585216" cy="219456"/>
+          </a:xfrm>
+          <a:prstGeom prst="rect">
+            <a:avLst/>
+          </a:prstGeom>
+          <a:noFill/>
+        </p:spPr>
+        <p:txBody>
+          <a:bodyPr wrap="none" lIns="18288" rIns="18288" tIns="18288" bIns="18288" anchor="ctr">
+            <a:spAutoFit/>
+          </a:bodyPr>
+          <a:lstStyle/>
+          <a:p>
+            <a:pPr algn="ctr"/>
+            <a:r>
+              <a:rPr sz="1200" b="1">
+                <a:solidFill>
+                  <a:srgbClr val="7A838E"/>
+                </a:solidFill>
+                <a:latin typeface="Arial"/>
+              </a:rPr>
+              <a:t>35</a:t>
+            </a:r>
+          </a:p>
+        </p:txBody>
+      </p:sp>
+      <p:sp>
+        <p:nvSpPr>
+          <p:cNvPr id="36" name="TextBox 35"/>
+          <p:cNvSpPr txBox="1"/>
+          <p:nvPr/>
+        </p:nvSpPr>
+        <p:spPr>
+          <a:xfrm>
+            <a:off x="2157984" y="4078224"/>
+            <a:ext cx="603504" cy="146304"/>
+          </a:xfrm>
+          <a:prstGeom prst="rect">
+            <a:avLst/>
+          </a:prstGeom>
+          <a:noFill/>
+        </p:spPr>
+        <p:txBody>
+          <a:bodyPr wrap="none" lIns="18288" rIns="18288" tIns="18288" bIns="18288" anchor="ctr">
+            <a:spAutoFit/>
+          </a:bodyPr>
+          <a:lstStyle/>
+          <a:p>
+            <a:pPr algn="ctr"/>
+            <a:r>
+              <a:rPr sz="730" b="0">
+                <a:solidFill>
+                  <a:srgbClr val="66717D"/>
+                </a:solidFill>
+                <a:latin typeface="Arial"/>
+              </a:rPr>
+              <a:t>blocked</a:t>
+            </a:r>
+          </a:p>
+        </p:txBody>
+      </p:sp>
+      <p:cxnSp>
+        <p:nvCxnSpPr>
+          <p:cNvPr id="37" name="Connector 36"/>
+          <p:cNvCxnSpPr/>
+          <p:nvPr/>
+        </p:nvCxnSpPr>
+        <p:spPr>
+          <a:xfrm flipH="1">
+            <a:off x="1380743" y="4288536"/>
+            <a:ext cx="256033" cy="128016"/>
+          </a:xfrm>
+          <a:prstGeom prst="line">
+            <a:avLst/>
+          </a:prstGeom>
+          <a:ln w="16510">
+            <a:solidFill>
+              <a:srgbClr val="C38A20"/>
+            </a:solidFill>
+          </a:ln>
+        </p:spPr>
+        <p:style>
+          <a:lnRef idx="2">
+            <a:schemeClr val="accent1"/>
+          </a:lnRef>
+          <a:fillRef idx="0">
+            <a:schemeClr val="accent1"/>
+          </a:fillRef>
+          <a:effectRef idx="1">
+            <a:schemeClr val="accent1"/>
+          </a:effectRef>
+          <a:fontRef idx="minor">
+            <a:schemeClr val="tx1"/>
+          </a:fontRef>
+        </p:style>
+      </p:cxnSp>
+      <p:cxnSp>
+        <p:nvCxnSpPr>
+          <p:cNvPr id="38" name="Connector 37"/>
+          <p:cNvCxnSpPr/>
+          <p:nvPr/>
+        </p:nvCxnSpPr>
+        <p:spPr>
+          <a:xfrm>
+            <a:off x="1636776" y="4288536"/>
+            <a:ext cx="566928" cy="128016"/>
+          </a:xfrm>
+          <a:prstGeom prst="line">
+            <a:avLst/>
+          </a:prstGeom>
+          <a:ln w="16510">
+            <a:solidFill>
+              <a:srgbClr val="C38A20"/>
+            </a:solidFill>
+          </a:ln>
+        </p:spPr>
+        <p:style>
+          <a:lnRef idx="2">
+            <a:schemeClr val="accent1"/>
+          </a:lnRef>
+          <a:fillRef idx="0">
+            <a:schemeClr val="accent1"/>
+          </a:fillRef>
+          <a:effectRef idx="1">
+            <a:schemeClr val="accent1"/>
+          </a:effectRef>
+          <a:fontRef idx="minor">
+            <a:schemeClr val="tx1"/>
+          </a:fontRef>
+        </p:style>
+      </p:cxnSp>
+      <p:sp>
+        <p:nvSpPr>
+          <p:cNvPr id="39" name="Rounded Rectangle 38"/>
+          <p:cNvSpPr/>
+          <p:nvPr/>
+        </p:nvSpPr>
+        <p:spPr>
+          <a:xfrm>
+            <a:off x="1069848" y="4389120"/>
+            <a:ext cx="621792" cy="438912"/>
+          </a:xfrm>
+          <a:prstGeom prst="roundRect">
+            <a:avLst/>
+          </a:prstGeom>
+          <a:solidFill>
+            <a:srgbClr val="E8EEFC"/>
           </a:solidFill>
           <a:ln w="10160">
             <a:solidFill>
@@ -3619,14 +4582,14 @@
       </p:sp>
       <p:sp>
         <p:nvSpPr>
-          <p:cNvPr id="15" name="TextBox 14"/>
+          <p:cNvPr id="40" name="TextBox 39"/>
           <p:cNvSpPr txBox="1"/>
           <p:nvPr/>
         </p:nvSpPr>
         <p:spPr>
           <a:xfrm>
-            <a:off x="1736445" y="2459736"/>
-            <a:ext cx="512064" cy="256032"/>
+            <a:off x="1106424" y="4416552"/>
+            <a:ext cx="548640" cy="210312"/>
           </a:xfrm>
           <a:prstGeom prst="rect">
             <a:avLst/>
@@ -3639,29 +4602,29 @@
           </a:bodyPr>
           <a:lstStyle/>
           <a:p>
-            <a:pPr algn="r"/>
-            <a:r>
-              <a:rPr sz="1000" b="1">
-                <a:solidFill>
-                  <a:srgbClr val="FFFFFF"/>
-                </a:solidFill>
-                <a:latin typeface="Aptos"/>
+            <a:pPr algn="ctr"/>
+            <a:r>
+              <a:rPr sz="1200" b="1">
+                <a:solidFill>
+                  <a:srgbClr val="315BCE"/>
+                </a:solidFill>
+                <a:latin typeface="Arial"/>
               </a:rPr>
-              <a:t>≈78%</a:t>
-            </a:r>
-          </a:p>
-        </p:txBody>
-      </p:sp>
-      <p:sp>
-        <p:nvSpPr>
-          <p:cNvPr id="16" name="TextBox 15"/>
+              <a:t>34</a:t>
+            </a:r>
+          </a:p>
+        </p:txBody>
+      </p:sp>
+      <p:sp>
+        <p:nvSpPr>
+          <p:cNvPr id="41" name="TextBox 40"/>
           <p:cNvSpPr txBox="1"/>
           <p:nvPr/>
         </p:nvSpPr>
         <p:spPr>
           <a:xfrm>
-            <a:off x="484632" y="2907791"/>
-            <a:ext cx="2331720" cy="301752"/>
+            <a:off x="1097280" y="4617720"/>
+            <a:ext cx="566928" cy="146304"/>
           </a:xfrm>
           <a:prstGeom prst="rect">
             <a:avLst/>
@@ -3674,144 +4637,39 @@
           </a:bodyPr>
           <a:lstStyle/>
           <a:p>
-            <a:pPr algn="l"/>
-            <a:r>
-              <a:rPr sz="1350" b="1">
-                <a:solidFill>
-                  <a:srgbClr val="315BCE"/>
-                </a:solidFill>
-                <a:latin typeface="Aptos"/>
+            <a:pPr algn="ctr"/>
+            <a:r>
+              <a:rPr sz="730" b="0">
+                <a:solidFill>
+                  <a:srgbClr val="66717D"/>
+                </a:solidFill>
+                <a:latin typeface="Arial"/>
               </a:rPr>
-              <a:t>+19 percentage points</a:t>
-            </a:r>
-          </a:p>
-        </p:txBody>
-      </p:sp>
-      <p:cxnSp>
-        <p:nvCxnSpPr>
-          <p:cNvPr id="17" name="Connector 16"/>
-          <p:cNvCxnSpPr/>
-          <p:nvPr/>
-        </p:nvCxnSpPr>
-        <p:spPr>
-          <a:xfrm>
-            <a:off x="484632" y="3319272"/>
-            <a:ext cx="2596896" cy="0"/>
-          </a:xfrm>
-          <a:prstGeom prst="line">
-            <a:avLst/>
-          </a:prstGeom>
-          <a:ln w="10160">
-            <a:solidFill>
-              <a:srgbClr val="DBE1E7"/>
-            </a:solidFill>
-          </a:ln>
-        </p:spPr>
-        <p:style>
-          <a:lnRef idx="2">
-            <a:schemeClr val="accent1"/>
-          </a:lnRef>
-          <a:fillRef idx="0">
-            <a:schemeClr val="accent1"/>
-          </a:fillRef>
-          <a:effectRef idx="1">
-            <a:schemeClr val="accent1"/>
-          </a:effectRef>
-          <a:fontRef idx="minor">
-            <a:schemeClr val="tx1"/>
-          </a:fontRef>
-        </p:style>
-      </p:cxnSp>
-      <p:sp>
-        <p:nvSpPr>
-          <p:cNvPr id="18" name="TextBox 17"/>
-          <p:cNvSpPr txBox="1"/>
-          <p:nvPr/>
-        </p:nvSpPr>
-        <p:spPr>
-          <a:xfrm>
-            <a:off x="484632" y="3474720"/>
-            <a:ext cx="2377440" cy="228600"/>
-          </a:xfrm>
-          <a:prstGeom prst="rect">
-            <a:avLst/>
-          </a:prstGeom>
-          <a:noFill/>
-        </p:spPr>
-        <p:txBody>
-          <a:bodyPr wrap="none" lIns="18288" rIns="18288" tIns="18288" bIns="18288" anchor="ctr">
-            <a:spAutoFit/>
-          </a:bodyPr>
-          <a:lstStyle/>
-          <a:p>
-            <a:pPr algn="l"/>
-            <a:r>
-              <a:rPr sz="950" b="1">
-                <a:solidFill>
-                  <a:srgbClr val="1E2732"/>
-                </a:solidFill>
-                <a:latin typeface="Aptos"/>
-              </a:rPr>
-              <a:t>Normalized aggregate tokens</a:t>
-            </a:r>
-          </a:p>
-        </p:txBody>
-      </p:sp>
-      <p:sp>
-        <p:nvSpPr>
-          <p:cNvPr id="19" name="TextBox 18"/>
-          <p:cNvSpPr txBox="1"/>
-          <p:nvPr/>
-        </p:nvSpPr>
-        <p:spPr>
-          <a:xfrm>
-            <a:off x="484632" y="3602735"/>
-            <a:ext cx="1280160" cy="182880"/>
-          </a:xfrm>
-          <a:prstGeom prst="rect">
-            <a:avLst/>
-          </a:prstGeom>
-          <a:noFill/>
-        </p:spPr>
-        <p:txBody>
-          <a:bodyPr wrap="none" lIns="18288" rIns="18288" tIns="18288" bIns="18288" anchor="ctr">
-            <a:spAutoFit/>
-          </a:bodyPr>
-          <a:lstStyle/>
-          <a:p>
-            <a:pPr algn="l"/>
-            <a:r>
-              <a:rPr sz="850" b="0">
-                <a:solidFill>
-                  <a:srgbClr val="1E2732"/>
-                </a:solidFill>
-                <a:latin typeface="Aptos"/>
-              </a:rPr>
-              <a:t>Direct Copilot</a:t>
-            </a:r>
-          </a:p>
-        </p:txBody>
-      </p:sp>
-      <p:sp>
-        <p:nvSpPr>
-          <p:cNvPr id="20" name="Rectangle 19"/>
+              <a:t>verifier</a:t>
+            </a:r>
+          </a:p>
+        </p:txBody>
+      </p:sp>
+      <p:sp>
+        <p:nvSpPr>
+          <p:cNvPr id="42" name="Rounded Rectangle 41"/>
           <p:cNvSpPr/>
           <p:nvPr/>
         </p:nvSpPr>
         <p:spPr>
           <a:xfrm>
-            <a:off x="484632" y="3822191"/>
-            <a:ext cx="2331720" cy="201168"/>
-          </a:xfrm>
-          <a:prstGeom prst="rect">
+            <a:off x="1892807" y="4389120"/>
+            <a:ext cx="621792" cy="438912"/>
+          </a:xfrm>
+          <a:prstGeom prst="roundRect">
             <a:avLst/>
           </a:prstGeom>
           <a:solidFill>
-            <a:srgbClr val="FFFFFF"/>
+            <a:srgbClr val="FCF6E5"/>
           </a:solidFill>
           <a:ln w="10160">
             <a:solidFill>
-              <a:srgbClr val="DBE1E7"/>
+              <a:srgbClr val="C38A20"/>
             </a:solidFill>
           </a:ln>
           <a:effectLst/>
@@ -3840,24 +4698,94 @@
       </p:sp>
       <p:sp>
         <p:nvSpPr>
-          <p:cNvPr id="21" name="Rectangle 20"/>
+          <p:cNvPr id="43" name="TextBox 42"/>
+          <p:cNvSpPr txBox="1"/>
+          <p:nvPr/>
+        </p:nvSpPr>
+        <p:spPr>
+          <a:xfrm>
+            <a:off x="1929384" y="4416552"/>
+            <a:ext cx="548640" cy="210312"/>
+          </a:xfrm>
+          <a:prstGeom prst="rect">
+            <a:avLst/>
+          </a:prstGeom>
+          <a:noFill/>
+        </p:spPr>
+        <p:txBody>
+          <a:bodyPr wrap="none" lIns="18288" rIns="18288" tIns="18288" bIns="18288" anchor="ctr">
+            <a:spAutoFit/>
+          </a:bodyPr>
+          <a:lstStyle/>
+          <a:p>
+            <a:pPr algn="ctr"/>
+            <a:r>
+              <a:rPr sz="1200" b="1">
+                <a:solidFill>
+                  <a:srgbClr val="C38A20"/>
+                </a:solidFill>
+                <a:latin typeface="Arial"/>
+              </a:rPr>
+              <a:t>22</a:t>
+            </a:r>
+          </a:p>
+        </p:txBody>
+      </p:sp>
+      <p:sp>
+        <p:nvSpPr>
+          <p:cNvPr id="44" name="TextBox 43"/>
+          <p:cNvSpPr txBox="1"/>
+          <p:nvPr/>
+        </p:nvSpPr>
+        <p:spPr>
+          <a:xfrm>
+            <a:off x="1920240" y="4617720"/>
+            <a:ext cx="566928" cy="146304"/>
+          </a:xfrm>
+          <a:prstGeom prst="rect">
+            <a:avLst/>
+          </a:prstGeom>
+          <a:noFill/>
+        </p:spPr>
+        <p:txBody>
+          <a:bodyPr wrap="none" lIns="18288" rIns="18288" tIns="18288" bIns="18288" anchor="ctr">
+            <a:spAutoFit/>
+          </a:bodyPr>
+          <a:lstStyle/>
+          <a:p>
+            <a:pPr algn="ctr"/>
+            <a:r>
+              <a:rPr sz="730" b="0">
+                <a:solidFill>
+                  <a:srgbClr val="66717D"/>
+                </a:solidFill>
+                <a:latin typeface="Arial"/>
+              </a:rPr>
+              <a:t>strict</a:t>
+            </a:r>
+          </a:p>
+        </p:txBody>
+      </p:sp>
+      <p:sp>
+        <p:nvSpPr>
+          <p:cNvPr id="45" name="Rounded Rectangle 44"/>
           <p:cNvSpPr/>
           <p:nvPr/>
         </p:nvSpPr>
         <p:spPr>
           <a:xfrm>
-            <a:off x="484632" y="3822191"/>
-            <a:ext cx="1554480" cy="201168"/>
-          </a:xfrm>
-          <a:prstGeom prst="rect">
+            <a:off x="3429000" y="228600"/>
+            <a:ext cx="7223760" cy="2057400"/>
+          </a:xfrm>
+          <a:prstGeom prst="roundRect">
             <a:avLst/>
           </a:prstGeom>
           <a:solidFill>
-            <a:srgbClr val="7A838E"/>
+            <a:srgbClr val="FFFDF8"/>
           </a:solidFill>
           <a:ln w="10160">
             <a:solidFill>
-              <a:srgbClr val="7A838E"/>
+              <a:srgbClr val="D8E0E8"/>
             </a:solidFill>
           </a:ln>
           <a:effectLst/>
@@ -3886,14 +4814,14 @@
       </p:sp>
       <p:sp>
         <p:nvSpPr>
-          <p:cNvPr id="22" name="TextBox 21"/>
+          <p:cNvPr id="46" name="TextBox 45"/>
           <p:cNvSpPr txBox="1"/>
           <p:nvPr/>
         </p:nvSpPr>
         <p:spPr>
           <a:xfrm>
-            <a:off x="2843784" y="3794759"/>
-            <a:ext cx="411480" cy="256032"/>
+            <a:off x="3575304" y="301752"/>
+            <a:ext cx="6931152" cy="274320"/>
           </a:xfrm>
           <a:prstGeom prst="rect">
             <a:avLst/>
@@ -3908,306 +4836,27 @@
           <a:p>
             <a:pPr algn="l"/>
             <a:r>
-              <a:rPr sz="950" b="1">
-                <a:solidFill>
-                  <a:srgbClr val="7A838E"/>
-                </a:solidFill>
-                <a:latin typeface="Aptos"/>
+              <a:rPr sz="1019" b="1">
+                <a:solidFill>
+                  <a:srgbClr val="173B70"/>
+                </a:solidFill>
+                <a:latin typeface="Arial"/>
               </a:rPr>
-              <a:t>1.00×</a:t>
-            </a:r>
-          </a:p>
-        </p:txBody>
-      </p:sp>
-      <p:sp>
-        <p:nvSpPr>
-          <p:cNvPr id="23" name="TextBox 22"/>
-          <p:cNvSpPr txBox="1"/>
-          <p:nvPr/>
-        </p:nvSpPr>
-        <p:spPr>
-          <a:xfrm>
-            <a:off x="484632" y="4123944"/>
-            <a:ext cx="1280160" cy="182880"/>
-          </a:xfrm>
-          <a:prstGeom prst="rect">
-            <a:avLst/>
-          </a:prstGeom>
-          <a:noFill/>
-        </p:spPr>
-        <p:txBody>
-          <a:bodyPr wrap="none" lIns="18288" rIns="18288" tIns="18288" bIns="18288" anchor="ctr">
-            <a:spAutoFit/>
-          </a:bodyPr>
-          <a:lstStyle/>
-          <a:p>
-            <a:pPr algn="l"/>
-            <a:r>
-              <a:rPr sz="850" b="0">
-                <a:solidFill>
-                  <a:srgbClr val="1E2732"/>
-                </a:solidFill>
-                <a:latin typeface="Aptos"/>
-              </a:rPr>
-              <a:t>Argus</a:t>
-            </a:r>
-          </a:p>
-        </p:txBody>
-      </p:sp>
-      <p:sp>
-        <p:nvSpPr>
-          <p:cNvPr id="24" name="Rectangle 23"/>
+              <a:t>(b) Solve tokens / task</a:t>
+            </a:r>
+          </a:p>
+        </p:txBody>
+      </p:sp>
+      <p:sp>
+        <p:nvSpPr>
+          <p:cNvPr id="47" name="Rectangle 46"/>
           <p:cNvSpPr/>
           <p:nvPr/>
         </p:nvSpPr>
         <p:spPr>
           <a:xfrm>
-            <a:off x="484632" y="4343400"/>
-            <a:ext cx="2331720" cy="201168"/>
-          </a:xfrm>
-          <a:prstGeom prst="rect">
-            <a:avLst/>
-          </a:prstGeom>
-          <a:solidFill>
-            <a:srgbClr val="FFFFFF"/>
-          </a:solidFill>
-          <a:ln w="10160">
-            <a:solidFill>
-              <a:srgbClr val="DBE1E7"/>
-            </a:solidFill>
-          </a:ln>
-          <a:effectLst/>
-        </p:spPr>
-        <p:style>
-          <a:lnRef idx="1">
-            <a:schemeClr val="accent1"/>
-          </a:lnRef>
-          <a:fillRef idx="3">
-            <a:schemeClr val="accent1"/>
-          </a:fillRef>
-          <a:effectRef idx="2">
-            <a:schemeClr val="accent1"/>
-          </a:effectRef>
-          <a:fontRef idx="minor">
-            <a:schemeClr val="lt1"/>
-          </a:fontRef>
-        </p:style>
-        <p:txBody>
-          <a:bodyPr rtlCol="0" anchor="ctr"/>
-          <a:lstStyle/>
-          <a:p>
-            <a:pPr algn="ctr"/>
-          </a:p>
-        </p:txBody>
-      </p:sp>
-      <p:sp>
-        <p:nvSpPr>
-          <p:cNvPr id="25" name="Rectangle 24"/>
-          <p:cNvSpPr/>
-          <p:nvPr/>
-        </p:nvSpPr>
-        <p:spPr>
-          <a:xfrm>
-            <a:off x="484632" y="4343400"/>
-            <a:ext cx="2191816" cy="201168"/>
-          </a:xfrm>
-          <a:prstGeom prst="rect">
-            <a:avLst/>
-          </a:prstGeom>
-          <a:solidFill>
-            <a:srgbClr val="315BCE"/>
-          </a:solidFill>
-          <a:ln w="10160">
-            <a:solidFill>
-              <a:srgbClr val="315BCE"/>
-            </a:solidFill>
-          </a:ln>
-          <a:effectLst/>
-        </p:spPr>
-        <p:style>
-          <a:lnRef idx="1">
-            <a:schemeClr val="accent1"/>
-          </a:lnRef>
-          <a:fillRef idx="3">
-            <a:schemeClr val="accent1"/>
-          </a:fillRef>
-          <a:effectRef idx="2">
-            <a:schemeClr val="accent1"/>
-          </a:effectRef>
-          <a:fontRef idx="minor">
-            <a:schemeClr val="lt1"/>
-          </a:fontRef>
-        </p:style>
-        <p:txBody>
-          <a:bodyPr rtlCol="0" anchor="ctr"/>
-          <a:lstStyle/>
-          <a:p>
-            <a:pPr algn="ctr"/>
-          </a:p>
-        </p:txBody>
-      </p:sp>
-      <p:sp>
-        <p:nvSpPr>
-          <p:cNvPr id="26" name="TextBox 25"/>
-          <p:cNvSpPr txBox="1"/>
-          <p:nvPr/>
-        </p:nvSpPr>
-        <p:spPr>
-          <a:xfrm>
-            <a:off x="2843784" y="4315968"/>
-            <a:ext cx="411480" cy="256032"/>
-          </a:xfrm>
-          <a:prstGeom prst="rect">
-            <a:avLst/>
-          </a:prstGeom>
-          <a:noFill/>
-        </p:spPr>
-        <p:txBody>
-          <a:bodyPr wrap="none" lIns="18288" rIns="18288" tIns="18288" bIns="18288" anchor="ctr">
-            <a:spAutoFit/>
-          </a:bodyPr>
-          <a:lstStyle/>
-          <a:p>
-            <a:pPr algn="l"/>
-            <a:r>
-              <a:rPr sz="950" b="1">
-                <a:solidFill>
-                  <a:srgbClr val="315BCE"/>
-                </a:solidFill>
-                <a:latin typeface="Aptos"/>
-              </a:rPr>
-              <a:t>1.41×</a:t>
-            </a:r>
-          </a:p>
-        </p:txBody>
-      </p:sp>
-      <p:sp>
-        <p:nvSpPr>
-          <p:cNvPr id="27" name="TextBox 26"/>
-          <p:cNvSpPr txBox="1"/>
-          <p:nvPr/>
-        </p:nvSpPr>
-        <p:spPr>
-          <a:xfrm>
-            <a:off x="484632" y="4828031"/>
-            <a:ext cx="2542032" cy="502920"/>
-          </a:xfrm>
-          <a:prstGeom prst="rect">
-            <a:avLst/>
-          </a:prstGeom>
-          <a:noFill/>
-        </p:spPr>
-        <p:txBody>
-          <a:bodyPr wrap="none" lIns="18288" rIns="18288" tIns="18288" bIns="18288" anchor="ctr">
-            <a:spAutoFit/>
-          </a:bodyPr>
-          <a:lstStyle/>
-          <a:p>
-            <a:pPr algn="l"/>
-            <a:r>
-              <a:rPr sz="810" b="0">
-                <a:solidFill>
-                  <a:srgbClr val="5E6875"/>
-                </a:solidFill>
-                <a:latin typeface="Aptos"/>
-              </a:rPr>
-              <a:t>Only the aggregate Token ratio is available;
-Copilot per-wave Token/time was not logged.</a:t>
-            </a:r>
-          </a:p>
-        </p:txBody>
-      </p:sp>
-      <p:sp>
-        <p:nvSpPr>
-          <p:cNvPr id="28" name="Rounded Rectangle 27"/>
-          <p:cNvSpPr/>
-          <p:nvPr/>
-        </p:nvSpPr>
-        <p:spPr>
-          <a:xfrm>
-            <a:off x="3429000" y="1051560"/>
-            <a:ext cx="7223760" cy="2194560"/>
-          </a:xfrm>
-          <a:prstGeom prst="roundRect">
-            <a:avLst/>
-          </a:prstGeom>
-          <a:solidFill>
-            <a:srgbClr val="FFFFFF"/>
-          </a:solidFill>
-          <a:ln w="10160">
-            <a:solidFill>
-              <a:srgbClr val="DBE1E7"/>
-            </a:solidFill>
-          </a:ln>
-          <a:effectLst/>
-        </p:spPr>
-        <p:style>
-          <a:lnRef idx="1">
-            <a:schemeClr val="accent1"/>
-          </a:lnRef>
-          <a:fillRef idx="3">
-            <a:schemeClr val="accent1"/>
-          </a:fillRef>
-          <a:effectRef idx="2">
-            <a:schemeClr val="accent1"/>
-          </a:effectRef>
-          <a:fontRef idx="minor">
-            <a:schemeClr val="lt1"/>
-          </a:fontRef>
-        </p:style>
-        <p:txBody>
-          <a:bodyPr rtlCol="0" anchor="ctr"/>
-          <a:lstStyle/>
-          <a:p>
-            <a:pPr algn="ctr"/>
-          </a:p>
-        </p:txBody>
-      </p:sp>
-      <p:sp>
-        <p:nvSpPr>
-          <p:cNvPr id="29" name="TextBox 28"/>
-          <p:cNvSpPr txBox="1"/>
-          <p:nvPr/>
-        </p:nvSpPr>
-        <p:spPr>
-          <a:xfrm>
-            <a:off x="3575304" y="1124712"/>
-            <a:ext cx="6931152" cy="274320"/>
-          </a:xfrm>
-          <a:prstGeom prst="rect">
-            <a:avLst/>
-          </a:prstGeom>
-          <a:noFill/>
-        </p:spPr>
-        <p:txBody>
-          <a:bodyPr wrap="none" lIns="18288" rIns="18288" tIns="18288" bIns="18288" anchor="ctr">
-            <a:spAutoFit/>
-          </a:bodyPr>
-          <a:lstStyle/>
-          <a:p>
-            <a:pPr algn="l"/>
-            <a:r>
-              <a:rPr sz="1150" b="1">
-                <a:solidFill>
-                  <a:srgbClr val="173B70"/>
-                </a:solidFill>
-                <a:latin typeface="Aptos"/>
-              </a:rPr>
-              <a:t>(b) Argus solve input per task</a:t>
-            </a:r>
-          </a:p>
-        </p:txBody>
-      </p:sp>
-      <p:sp>
-        <p:nvSpPr>
-          <p:cNvPr id="30" name="Rectangle 29"/>
-          <p:cNvSpPr/>
-          <p:nvPr/>
-        </p:nvSpPr>
-        <p:spPr>
-          <a:xfrm>
-            <a:off x="9838944" y="1490472"/>
-            <a:ext cx="640080" cy="1335024"/>
+            <a:off x="9838944" y="667512"/>
+            <a:ext cx="640080" cy="1197864"/>
           </a:xfrm>
           <a:prstGeom prst="rect">
             <a:avLst/>
@@ -4246,13 +4895,13 @@
       </p:sp>
       <p:cxnSp>
         <p:nvCxnSpPr>
-          <p:cNvPr id="31" name="Connector 30"/>
+          <p:cNvPr id="48" name="Connector 47"/>
           <p:cNvCxnSpPr/>
           <p:nvPr/>
         </p:nvCxnSpPr>
         <p:spPr>
           <a:xfrm>
-            <a:off x="3941064" y="2825496"/>
+            <a:off x="3941064" y="1865376"/>
             <a:ext cx="6217920" cy="0"/>
           </a:xfrm>
           <a:prstGeom prst="line">
@@ -4260,7 +4909,7 @@
           </a:prstGeom>
           <a:ln w="8255">
             <a:solidFill>
-              <a:srgbClr val="DBE1E7"/>
+              <a:srgbClr val="D8E0E8"/>
             </a:solidFill>
           </a:ln>
         </p:spPr>
@@ -4281,13 +4930,13 @@
       </p:cxnSp>
       <p:sp>
         <p:nvSpPr>
-          <p:cNvPr id="32" name="TextBox 31"/>
+          <p:cNvPr id="49" name="TextBox 48"/>
           <p:cNvSpPr txBox="1"/>
           <p:nvPr/>
         </p:nvSpPr>
         <p:spPr>
           <a:xfrm>
-            <a:off x="3502152" y="2724912"/>
+            <a:off x="3502152" y="1764792"/>
             <a:ext cx="347472" cy="201168"/>
           </a:xfrm>
           <a:prstGeom prst="rect">
@@ -4305,9 +4954,9 @@
             <a:r>
               <a:rPr sz="750" b="0">
                 <a:solidFill>
-                  <a:srgbClr val="5E6875"/>
-                </a:solidFill>
-                <a:latin typeface="Aptos"/>
+                  <a:srgbClr val="66717D"/>
+                </a:solidFill>
+                <a:latin typeface="Arial"/>
               </a:rPr>
               <a:t>0</a:t>
             </a:r>
@@ -4316,13 +4965,13 @@
       </p:sp>
       <p:cxnSp>
         <p:nvCxnSpPr>
-          <p:cNvPr id="33" name="Connector 32"/>
+          <p:cNvPr id="50" name="Connector 49"/>
           <p:cNvCxnSpPr/>
           <p:nvPr/>
         </p:nvCxnSpPr>
         <p:spPr>
           <a:xfrm>
-            <a:off x="3941064" y="2507633"/>
+            <a:off x="3941064" y="1580170"/>
             <a:ext cx="6217920" cy="0"/>
           </a:xfrm>
           <a:prstGeom prst="line">
@@ -4330,7 +4979,7 @@
           </a:prstGeom>
           <a:ln w="8255">
             <a:solidFill>
-              <a:srgbClr val="DBE1E7"/>
+              <a:srgbClr val="D8E0E8"/>
             </a:solidFill>
           </a:ln>
         </p:spPr>
@@ -4351,13 +5000,13 @@
       </p:cxnSp>
       <p:sp>
         <p:nvSpPr>
-          <p:cNvPr id="34" name="TextBox 33"/>
+          <p:cNvPr id="51" name="TextBox 50"/>
           <p:cNvSpPr txBox="1"/>
           <p:nvPr/>
         </p:nvSpPr>
         <p:spPr>
           <a:xfrm>
-            <a:off x="3502152" y="2407049"/>
+            <a:off x="3502152" y="1479586"/>
             <a:ext cx="347472" cy="201168"/>
           </a:xfrm>
           <a:prstGeom prst="rect">
@@ -4375,9 +5024,9 @@
             <a:r>
               <a:rPr sz="750" b="0">
                 <a:solidFill>
-                  <a:srgbClr val="5E6875"/>
-                </a:solidFill>
-                <a:latin typeface="Aptos"/>
+                  <a:srgbClr val="66717D"/>
+                </a:solidFill>
+                <a:latin typeface="Arial"/>
               </a:rPr>
               <a:t>1</a:t>
             </a:r>
@@ -4386,13 +5035,13 @@
       </p:sp>
       <p:cxnSp>
         <p:nvCxnSpPr>
-          <p:cNvPr id="35" name="Connector 34"/>
+          <p:cNvPr id="52" name="Connector 51"/>
           <p:cNvCxnSpPr/>
           <p:nvPr/>
         </p:nvCxnSpPr>
         <p:spPr>
           <a:xfrm>
-            <a:off x="3941064" y="2189770"/>
+            <a:off x="3941064" y="1294964"/>
             <a:ext cx="6217920" cy="0"/>
           </a:xfrm>
           <a:prstGeom prst="line">
@@ -4400,7 +5049,7 @@
           </a:prstGeom>
           <a:ln w="8255">
             <a:solidFill>
-              <a:srgbClr val="DBE1E7"/>
+              <a:srgbClr val="D8E0E8"/>
             </a:solidFill>
           </a:ln>
         </p:spPr>
@@ -4421,13 +5070,13 @@
       </p:cxnSp>
       <p:sp>
         <p:nvSpPr>
-          <p:cNvPr id="36" name="TextBox 35"/>
+          <p:cNvPr id="53" name="TextBox 52"/>
           <p:cNvSpPr txBox="1"/>
           <p:nvPr/>
         </p:nvSpPr>
         <p:spPr>
           <a:xfrm>
-            <a:off x="3502152" y="2089186"/>
+            <a:off x="3502152" y="1194380"/>
             <a:ext cx="347472" cy="201168"/>
           </a:xfrm>
           <a:prstGeom prst="rect">
@@ -4445,9 +5094,9 @@
             <a:r>
               <a:rPr sz="750" b="0">
                 <a:solidFill>
-                  <a:srgbClr val="5E6875"/>
-                </a:solidFill>
-                <a:latin typeface="Aptos"/>
+                  <a:srgbClr val="66717D"/>
+                </a:solidFill>
+                <a:latin typeface="Arial"/>
               </a:rPr>
               <a:t>2</a:t>
             </a:r>
@@ -4456,13 +5105,13 @@
       </p:sp>
       <p:cxnSp>
         <p:nvCxnSpPr>
-          <p:cNvPr id="37" name="Connector 36"/>
+          <p:cNvPr id="54" name="Connector 53"/>
           <p:cNvCxnSpPr/>
           <p:nvPr/>
         </p:nvCxnSpPr>
         <p:spPr>
           <a:xfrm>
-            <a:off x="3941064" y="1871907"/>
+            <a:off x="3941064" y="1009758"/>
             <a:ext cx="6217920" cy="0"/>
           </a:xfrm>
           <a:prstGeom prst="line">
@@ -4470,7 +5119,7 @@
           </a:prstGeom>
           <a:ln w="8255">
             <a:solidFill>
-              <a:srgbClr val="DBE1E7"/>
+              <a:srgbClr val="D8E0E8"/>
             </a:solidFill>
           </a:ln>
         </p:spPr>
@@ -4491,13 +5140,13 @@
       </p:cxnSp>
       <p:sp>
         <p:nvSpPr>
-          <p:cNvPr id="38" name="TextBox 37"/>
+          <p:cNvPr id="55" name="TextBox 54"/>
           <p:cNvSpPr txBox="1"/>
           <p:nvPr/>
         </p:nvSpPr>
         <p:spPr>
           <a:xfrm>
-            <a:off x="3502152" y="1771323"/>
+            <a:off x="3502152" y="909174"/>
             <a:ext cx="347472" cy="201168"/>
           </a:xfrm>
           <a:prstGeom prst="rect">
@@ -4515,9 +5164,9 @@
             <a:r>
               <a:rPr sz="750" b="0">
                 <a:solidFill>
-                  <a:srgbClr val="5E6875"/>
-                </a:solidFill>
-                <a:latin typeface="Aptos"/>
+                  <a:srgbClr val="66717D"/>
+                </a:solidFill>
+                <a:latin typeface="Arial"/>
               </a:rPr>
               <a:t>3</a:t>
             </a:r>
@@ -4526,13 +5175,13 @@
       </p:sp>
       <p:cxnSp>
         <p:nvCxnSpPr>
-          <p:cNvPr id="39" name="Connector 38"/>
+          <p:cNvPr id="56" name="Connector 55"/>
           <p:cNvCxnSpPr/>
           <p:nvPr/>
         </p:nvCxnSpPr>
         <p:spPr>
           <a:xfrm>
-            <a:off x="3941064" y="1554044"/>
+            <a:off x="3941064" y="724553"/>
             <a:ext cx="6217920" cy="0"/>
           </a:xfrm>
           <a:prstGeom prst="line">
@@ -4540,7 +5189,7 @@
           </a:prstGeom>
           <a:ln w="8255">
             <a:solidFill>
-              <a:srgbClr val="DBE1E7"/>
+              <a:srgbClr val="D8E0E8"/>
             </a:solidFill>
           </a:ln>
         </p:spPr>
@@ -4561,13 +5210,13 @@
       </p:cxnSp>
       <p:sp>
         <p:nvSpPr>
-          <p:cNvPr id="40" name="TextBox 39"/>
+          <p:cNvPr id="57" name="TextBox 56"/>
           <p:cNvSpPr txBox="1"/>
           <p:nvPr/>
         </p:nvSpPr>
         <p:spPr>
           <a:xfrm>
-            <a:off x="3502152" y="1453460"/>
+            <a:off x="3502152" y="623969"/>
             <a:ext cx="347472" cy="201168"/>
           </a:xfrm>
           <a:prstGeom prst="rect">
@@ -4585,9 +5234,9 @@
             <a:r>
               <a:rPr sz="750" b="0">
                 <a:solidFill>
-                  <a:srgbClr val="5E6875"/>
-                </a:solidFill>
-                <a:latin typeface="Aptos"/>
+                  <a:srgbClr val="66717D"/>
+                </a:solidFill>
+                <a:latin typeface="Arial"/>
               </a:rPr>
               <a:t>4</a:t>
             </a:r>
@@ -4596,13 +5245,13 @@
       </p:sp>
       <p:sp>
         <p:nvSpPr>
-          <p:cNvPr id="41" name="Oval 40"/>
+          <p:cNvPr id="58" name="Oval 57"/>
           <p:cNvSpPr/>
           <p:nvPr/>
         </p:nvSpPr>
         <p:spPr>
           <a:xfrm>
-            <a:off x="3872484" y="1819394"/>
+            <a:off x="3872484" y="955594"/>
             <a:ext cx="137160" cy="137160"/>
           </a:xfrm>
           <a:prstGeom prst="ellipse">
@@ -4613,7 +5262,7 @@
           </a:solidFill>
           <a:ln w="12700">
             <a:solidFill>
-              <a:srgbClr val="FFFFFF"/>
+              <a:srgbClr val="FFFDF8"/>
             </a:solidFill>
           </a:ln>
           <a:effectLst/>
@@ -4642,13 +5291,13 @@
       </p:sp>
       <p:sp>
         <p:nvSpPr>
-          <p:cNvPr id="42" name="TextBox 41"/>
+          <p:cNvPr id="59" name="TextBox 58"/>
           <p:cNvSpPr txBox="1"/>
           <p:nvPr/>
         </p:nvSpPr>
         <p:spPr>
           <a:xfrm>
-            <a:off x="3621024" y="1595366"/>
+            <a:off x="3621024" y="731566"/>
             <a:ext cx="640080" cy="201168"/>
           </a:xfrm>
           <a:prstGeom prst="rect">
@@ -4668,7 +5317,7 @@
                 <a:solidFill>
                   <a:srgbClr val="315BCE"/>
                 </a:solidFill>
-                <a:latin typeface="Aptos"/>
+                <a:latin typeface="Arial"/>
               </a:rPr>
               <a:t>2.95M</a:t>
             </a:r>
@@ -4677,14 +5326,14 @@
       </p:sp>
       <p:sp>
         <p:nvSpPr>
-          <p:cNvPr id="43" name="TextBox 42"/>
+          <p:cNvPr id="60" name="TextBox 59"/>
           <p:cNvSpPr txBox="1"/>
           <p:nvPr/>
         </p:nvSpPr>
         <p:spPr>
           <a:xfrm>
-            <a:off x="3547872" y="2889503"/>
-            <a:ext cx="786384" cy="182880"/>
+            <a:off x="3547872" y="1956816"/>
+            <a:ext cx="786384" cy="219456"/>
           </a:xfrm>
           <a:prstGeom prst="rect">
             <a:avLst/>
@@ -4699,62 +5348,27 @@
           <a:p>
             <a:pPr algn="ctr"/>
             <a:r>
-              <a:rPr sz="760" b="1">
-                <a:solidFill>
-                  <a:srgbClr val="1E2732"/>
-                </a:solidFill>
-                <a:latin typeface="Aptos"/>
+              <a:rPr sz="840" b="1">
+                <a:solidFill>
+                  <a:srgbClr val="24465D"/>
+                </a:solidFill>
+                <a:latin typeface="Arial"/>
               </a:rPr>
               <a:t>W1–6</a:t>
             </a:r>
           </a:p>
         </p:txBody>
       </p:sp>
-      <p:sp>
-        <p:nvSpPr>
-          <p:cNvPr id="44" name="TextBox 43"/>
-          <p:cNvSpPr txBox="1"/>
-          <p:nvPr/>
-        </p:nvSpPr>
-        <p:spPr>
-          <a:xfrm>
-            <a:off x="3438144" y="3072384"/>
-            <a:ext cx="1005840" cy="182880"/>
-          </a:xfrm>
-          <a:prstGeom prst="rect">
-            <a:avLst/>
-          </a:prstGeom>
-          <a:noFill/>
-        </p:spPr>
-        <p:txBody>
-          <a:bodyPr wrap="none" lIns="18288" rIns="18288" tIns="18288" bIns="18288" anchor="ctr">
-            <a:spAutoFit/>
-          </a:bodyPr>
-          <a:lstStyle/>
-          <a:p>
-            <a:pPr algn="ctr"/>
-            <a:r>
-              <a:rPr sz="700" b="0">
-                <a:solidFill>
-                  <a:srgbClr val="5E6875"/>
-                </a:solidFill>
-                <a:latin typeface="Aptos"/>
-              </a:rPr>
-              <a:t>Start-up</a:t>
-            </a:r>
-          </a:p>
-        </p:txBody>
-      </p:sp>
       <p:cxnSp>
         <p:nvCxnSpPr>
-          <p:cNvPr id="45" name="Connector 44"/>
+          <p:cNvPr id="61" name="Connector 60"/>
           <p:cNvCxnSpPr/>
           <p:nvPr/>
         </p:nvCxnSpPr>
         <p:spPr>
           <a:xfrm>
-            <a:off x="3941064" y="1887974"/>
-            <a:ext cx="1554480" cy="278881"/>
+            <a:off x="3941064" y="1024174"/>
+            <a:ext cx="1554480" cy="250229"/>
           </a:xfrm>
           <a:prstGeom prst="line">
             <a:avLst/>
@@ -4782,13 +5396,13 @@
       </p:cxnSp>
       <p:sp>
         <p:nvSpPr>
-          <p:cNvPr id="46" name="Oval 45"/>
+          <p:cNvPr id="62" name="Oval 61"/>
           <p:cNvSpPr/>
           <p:nvPr/>
         </p:nvSpPr>
         <p:spPr>
           <a:xfrm>
-            <a:off x="5426964" y="2098275"/>
+            <a:off x="5426964" y="1205823"/>
             <a:ext cx="137160" cy="137160"/>
           </a:xfrm>
           <a:prstGeom prst="ellipse">
@@ -4799,7 +5413,7 @@
           </a:solidFill>
           <a:ln w="12700">
             <a:solidFill>
-              <a:srgbClr val="FFFFFF"/>
+              <a:srgbClr val="FFFDF8"/>
             </a:solidFill>
           </a:ln>
           <a:effectLst/>
@@ -4828,13 +5442,13 @@
       </p:sp>
       <p:sp>
         <p:nvSpPr>
-          <p:cNvPr id="47" name="TextBox 46"/>
+          <p:cNvPr id="63" name="TextBox 62"/>
           <p:cNvSpPr txBox="1"/>
           <p:nvPr/>
         </p:nvSpPr>
         <p:spPr>
           <a:xfrm>
-            <a:off x="5175504" y="1874247"/>
+            <a:off x="5175504" y="981795"/>
             <a:ext cx="640080" cy="201168"/>
           </a:xfrm>
           <a:prstGeom prst="rect">
@@ -4854,7 +5468,7 @@
                 <a:solidFill>
                   <a:srgbClr val="315BCE"/>
                 </a:solidFill>
-                <a:latin typeface="Aptos"/>
+                <a:latin typeface="Arial"/>
               </a:rPr>
               <a:t>2.07M</a:t>
             </a:r>
@@ -4863,14 +5477,14 @@
       </p:sp>
       <p:sp>
         <p:nvSpPr>
-          <p:cNvPr id="48" name="TextBox 47"/>
+          <p:cNvPr id="64" name="TextBox 63"/>
           <p:cNvSpPr txBox="1"/>
           <p:nvPr/>
         </p:nvSpPr>
         <p:spPr>
           <a:xfrm>
-            <a:off x="5102352" y="2889503"/>
-            <a:ext cx="786384" cy="182880"/>
+            <a:off x="5102352" y="1956816"/>
+            <a:ext cx="786384" cy="219456"/>
           </a:xfrm>
           <a:prstGeom prst="rect">
             <a:avLst/>
@@ -4885,62 +5499,27 @@
           <a:p>
             <a:pPr algn="ctr"/>
             <a:r>
-              <a:rPr sz="760" b="1">
-                <a:solidFill>
-                  <a:srgbClr val="1E2732"/>
-                </a:solidFill>
-                <a:latin typeface="Aptos"/>
+              <a:rPr sz="840" b="1">
+                <a:solidFill>
+                  <a:srgbClr val="24465D"/>
+                </a:solidFill>
+                <a:latin typeface="Arial"/>
               </a:rPr>
               <a:t>W7–12</a:t>
             </a:r>
           </a:p>
         </p:txBody>
       </p:sp>
-      <p:sp>
-        <p:nvSpPr>
-          <p:cNvPr id="49" name="TextBox 48"/>
-          <p:cNvSpPr txBox="1"/>
-          <p:nvPr/>
-        </p:nvSpPr>
-        <p:spPr>
-          <a:xfrm>
-            <a:off x="4992624" y="3072384"/>
-            <a:ext cx="1005840" cy="182880"/>
-          </a:xfrm>
-          <a:prstGeom prst="rect">
-            <a:avLst/>
-          </a:prstGeom>
-          <a:noFill/>
-        </p:spPr>
-        <p:txBody>
-          <a:bodyPr wrap="none" lIns="18288" rIns="18288" tIns="18288" bIns="18288" anchor="ctr">
-            <a:spAutoFit/>
-          </a:bodyPr>
-          <a:lstStyle/>
-          <a:p>
-            <a:pPr algn="ctr"/>
-            <a:r>
-              <a:rPr sz="700" b="0">
-                <a:solidFill>
-                  <a:srgbClr val="5E6875"/>
-                </a:solidFill>
-                <a:latin typeface="Aptos"/>
-              </a:rPr>
-              <a:t>Early reuse</a:t>
-            </a:r>
-          </a:p>
-        </p:txBody>
-      </p:sp>
       <p:cxnSp>
         <p:nvCxnSpPr>
-          <p:cNvPr id="50" name="Connector 49"/>
+          <p:cNvPr id="65" name="Connector 64"/>
           <p:cNvCxnSpPr/>
           <p:nvPr/>
         </p:nvCxnSpPr>
         <p:spPr>
           <a:xfrm>
-            <a:off x="5495544" y="2166855"/>
-            <a:ext cx="1554480" cy="190885"/>
+            <a:off x="5495544" y="1274403"/>
+            <a:ext cx="1554480" cy="171274"/>
           </a:xfrm>
           <a:prstGeom prst="line">
             <a:avLst/>
@@ -4968,13 +5547,13 @@
       </p:cxnSp>
       <p:sp>
         <p:nvSpPr>
-          <p:cNvPr id="51" name="Oval 50"/>
+          <p:cNvPr id="66" name="Oval 65"/>
           <p:cNvSpPr/>
           <p:nvPr/>
         </p:nvSpPr>
         <p:spPr>
           <a:xfrm>
-            <a:off x="6981444" y="2289160"/>
+            <a:off x="6981444" y="1377097"/>
             <a:ext cx="137160" cy="137160"/>
           </a:xfrm>
           <a:prstGeom prst="ellipse">
@@ -4985,7 +5564,7 @@
           </a:solidFill>
           <a:ln w="12700">
             <a:solidFill>
-              <a:srgbClr val="FFFFFF"/>
+              <a:srgbClr val="FFFDF8"/>
             </a:solidFill>
           </a:ln>
           <a:effectLst/>
@@ -5014,13 +5593,13 @@
       </p:sp>
       <p:sp>
         <p:nvSpPr>
-          <p:cNvPr id="52" name="TextBox 51"/>
+          <p:cNvPr id="67" name="TextBox 66"/>
           <p:cNvSpPr txBox="1"/>
           <p:nvPr/>
         </p:nvSpPr>
         <p:spPr>
           <a:xfrm>
-            <a:off x="6729984" y="2065132"/>
+            <a:off x="6729984" y="1153069"/>
             <a:ext cx="640080" cy="201168"/>
           </a:xfrm>
           <a:prstGeom prst="rect">
@@ -5040,7 +5619,7 @@
                 <a:solidFill>
                   <a:srgbClr val="315BCE"/>
                 </a:solidFill>
-                <a:latin typeface="Aptos"/>
+                <a:latin typeface="Arial"/>
               </a:rPr>
               <a:t>1.47M</a:t>
             </a:r>
@@ -5049,14 +5628,14 @@
       </p:sp>
       <p:sp>
         <p:nvSpPr>
-          <p:cNvPr id="53" name="TextBox 52"/>
+          <p:cNvPr id="68" name="TextBox 67"/>
           <p:cNvSpPr txBox="1"/>
           <p:nvPr/>
         </p:nvSpPr>
         <p:spPr>
           <a:xfrm>
-            <a:off x="6656832" y="2889503"/>
-            <a:ext cx="786384" cy="182880"/>
+            <a:off x="6656832" y="1956816"/>
+            <a:ext cx="786384" cy="219456"/>
           </a:xfrm>
           <a:prstGeom prst="rect">
             <a:avLst/>
@@ -5071,62 +5650,27 @@
           <a:p>
             <a:pPr algn="ctr"/>
             <a:r>
-              <a:rPr sz="760" b="1">
-                <a:solidFill>
-                  <a:srgbClr val="1E2732"/>
-                </a:solidFill>
-                <a:latin typeface="Aptos"/>
+              <a:rPr sz="840" b="1">
+                <a:solidFill>
+                  <a:srgbClr val="24465D"/>
+                </a:solidFill>
+                <a:latin typeface="Arial"/>
               </a:rPr>
               <a:t>W13–18</a:t>
             </a:r>
           </a:p>
         </p:txBody>
       </p:sp>
-      <p:sp>
-        <p:nvSpPr>
-          <p:cNvPr id="54" name="TextBox 53"/>
-          <p:cNvSpPr txBox="1"/>
-          <p:nvPr/>
-        </p:nvSpPr>
-        <p:spPr>
-          <a:xfrm>
-            <a:off x="6547104" y="3072384"/>
-            <a:ext cx="1005840" cy="182880"/>
-          </a:xfrm>
-          <a:prstGeom prst="rect">
-            <a:avLst/>
-          </a:prstGeom>
-          <a:noFill/>
-        </p:spPr>
-        <p:txBody>
-          <a:bodyPr wrap="none" lIns="18288" rIns="18288" tIns="18288" bIns="18288" anchor="ctr">
-            <a:spAutoFit/>
-          </a:bodyPr>
-          <a:lstStyle/>
-          <a:p>
-            <a:pPr algn="ctr"/>
-            <a:r>
-              <a:rPr sz="700" b="0">
-                <a:solidFill>
-                  <a:srgbClr val="5E6875"/>
-                </a:solidFill>
-                <a:latin typeface="Aptos"/>
-              </a:rPr>
-              <a:t>Composition shift</a:t>
-            </a:r>
-          </a:p>
-        </p:txBody>
-      </p:sp>
       <p:cxnSp>
         <p:nvCxnSpPr>
-          <p:cNvPr id="55" name="Connector 54"/>
+          <p:cNvPr id="69" name="Connector 68"/>
           <p:cNvCxnSpPr/>
           <p:nvPr/>
         </p:nvCxnSpPr>
         <p:spPr>
           <a:xfrm flipV="1">
-            <a:off x="7050024" y="2085845"/>
-            <a:ext cx="1554480" cy="271895"/>
+            <a:off x="7050024" y="1201717"/>
+            <a:ext cx="1554480" cy="243960"/>
           </a:xfrm>
           <a:prstGeom prst="line">
             <a:avLst/>
@@ -5154,13 +5698,13 @@
       </p:cxnSp>
       <p:sp>
         <p:nvSpPr>
-          <p:cNvPr id="56" name="Oval 55"/>
+          <p:cNvPr id="70" name="Oval 69"/>
           <p:cNvSpPr/>
           <p:nvPr/>
         </p:nvSpPr>
         <p:spPr>
           <a:xfrm>
-            <a:off x="8535924" y="2017265"/>
+            <a:off x="8535924" y="1133137"/>
             <a:ext cx="137160" cy="137160"/>
           </a:xfrm>
           <a:prstGeom prst="ellipse">
@@ -5171,7 +5715,7 @@
           </a:solidFill>
           <a:ln w="12700">
             <a:solidFill>
-              <a:srgbClr val="FFFFFF"/>
+              <a:srgbClr val="FFFDF8"/>
             </a:solidFill>
           </a:ln>
           <a:effectLst/>
@@ -5200,13 +5744,13 @@
       </p:sp>
       <p:sp>
         <p:nvSpPr>
-          <p:cNvPr id="57" name="TextBox 56"/>
+          <p:cNvPr id="71" name="TextBox 70"/>
           <p:cNvSpPr txBox="1"/>
           <p:nvPr/>
         </p:nvSpPr>
         <p:spPr>
           <a:xfrm>
-            <a:off x="8284464" y="1793237"/>
+            <a:off x="8284464" y="909109"/>
             <a:ext cx="640080" cy="201168"/>
           </a:xfrm>
           <a:prstGeom prst="rect">
@@ -5226,7 +5770,7 @@
                 <a:solidFill>
                   <a:srgbClr val="315BCE"/>
                 </a:solidFill>
-                <a:latin typeface="Aptos"/>
+                <a:latin typeface="Arial"/>
               </a:rPr>
               <a:t>2.33M</a:t>
             </a:r>
@@ -5235,14 +5779,14 @@
       </p:sp>
       <p:sp>
         <p:nvSpPr>
-          <p:cNvPr id="58" name="TextBox 57"/>
+          <p:cNvPr id="72" name="TextBox 71"/>
           <p:cNvSpPr txBox="1"/>
           <p:nvPr/>
         </p:nvSpPr>
         <p:spPr>
           <a:xfrm>
-            <a:off x="8211312" y="2889503"/>
-            <a:ext cx="786384" cy="182880"/>
+            <a:off x="8211312" y="1956816"/>
+            <a:ext cx="786384" cy="219456"/>
           </a:xfrm>
           <a:prstGeom prst="rect">
             <a:avLst/>
@@ -5257,62 +5801,27 @@
           <a:p>
             <a:pPr algn="ctr"/>
             <a:r>
-              <a:rPr sz="760" b="1">
-                <a:solidFill>
-                  <a:srgbClr val="1E2732"/>
-                </a:solidFill>
-                <a:latin typeface="Aptos"/>
+              <a:rPr sz="840" b="1">
+                <a:solidFill>
+                  <a:srgbClr val="24465D"/>
+                </a:solidFill>
+                <a:latin typeface="Arial"/>
               </a:rPr>
               <a:t>W19–22</a:t>
             </a:r>
           </a:p>
         </p:txBody>
       </p:sp>
-      <p:sp>
-        <p:nvSpPr>
-          <p:cNvPr id="59" name="TextBox 58"/>
-          <p:cNvSpPr txBox="1"/>
-          <p:nvPr/>
-        </p:nvSpPr>
-        <p:spPr>
-          <a:xfrm>
-            <a:off x="8101583" y="3072384"/>
-            <a:ext cx="1005840" cy="182880"/>
-          </a:xfrm>
-          <a:prstGeom prst="rect">
-            <a:avLst/>
-          </a:prstGeom>
-          <a:noFill/>
-        </p:spPr>
-        <p:txBody>
-          <a:bodyPr wrap="none" lIns="18288" rIns="18288" tIns="18288" bIns="18288" anchor="ctr">
-            <a:spAutoFit/>
-          </a:bodyPr>
-          <a:lstStyle/>
-          <a:p>
-            <a:pPr algn="ctr"/>
-            <a:r>
-              <a:rPr sz="700" b="0">
-                <a:solidFill>
-                  <a:srgbClr val="5E6875"/>
-                </a:solidFill>
-                <a:latin typeface="Aptos"/>
-              </a:rPr>
-              <a:t>Mature</a:t>
-            </a:r>
-          </a:p>
-        </p:txBody>
-      </p:sp>
       <p:cxnSp>
         <p:nvCxnSpPr>
-          <p:cNvPr id="60" name="Connector 59"/>
+          <p:cNvPr id="73" name="Connector 72"/>
           <p:cNvCxnSpPr/>
           <p:nvPr/>
         </p:nvCxnSpPr>
         <p:spPr>
           <a:xfrm flipV="1">
-            <a:off x="8604504" y="1643373"/>
-            <a:ext cx="1554480" cy="442472"/>
+            <a:off x="8604504" y="804704"/>
+            <a:ext cx="1554480" cy="397013"/>
           </a:xfrm>
           <a:prstGeom prst="line">
             <a:avLst/>
@@ -5340,13 +5849,13 @@
       </p:cxnSp>
       <p:sp>
         <p:nvSpPr>
-          <p:cNvPr id="61" name="Oval 60"/>
+          <p:cNvPr id="74" name="Oval 73"/>
           <p:cNvSpPr/>
           <p:nvPr/>
         </p:nvSpPr>
         <p:spPr>
           <a:xfrm>
-            <a:off x="10090404" y="1574793"/>
+            <a:off x="10090404" y="736124"/>
             <a:ext cx="137160" cy="137160"/>
           </a:xfrm>
           <a:prstGeom prst="ellipse">
@@ -5357,7 +5866,7 @@
           </a:solidFill>
           <a:ln w="12700">
             <a:solidFill>
-              <a:srgbClr val="FFFFFF"/>
+              <a:srgbClr val="FFFDF8"/>
             </a:solidFill>
           </a:ln>
           <a:effectLst/>
@@ -5386,13 +5895,13 @@
       </p:sp>
       <p:sp>
         <p:nvSpPr>
-          <p:cNvPr id="62" name="TextBox 61"/>
+          <p:cNvPr id="75" name="TextBox 74"/>
           <p:cNvSpPr txBox="1"/>
           <p:nvPr/>
         </p:nvSpPr>
         <p:spPr>
           <a:xfrm>
-            <a:off x="9838944" y="1350765"/>
+            <a:off x="9838944" y="512096"/>
             <a:ext cx="640080" cy="201168"/>
           </a:xfrm>
           <a:prstGeom prst="rect">
@@ -5412,7 +5921,7 @@
                 <a:solidFill>
                   <a:srgbClr val="C38A20"/>
                 </a:solidFill>
-                <a:latin typeface="Aptos"/>
+                <a:latin typeface="Arial"/>
               </a:rPr>
               <a:t>3.72M</a:t>
             </a:r>
@@ -5421,14 +5930,14 @@
       </p:sp>
       <p:sp>
         <p:nvSpPr>
-          <p:cNvPr id="63" name="TextBox 62"/>
+          <p:cNvPr id="76" name="TextBox 75"/>
           <p:cNvSpPr txBox="1"/>
           <p:nvPr/>
         </p:nvSpPr>
         <p:spPr>
           <a:xfrm>
-            <a:off x="9765792" y="2889503"/>
-            <a:ext cx="786384" cy="182880"/>
+            <a:off x="9765792" y="1956816"/>
+            <a:ext cx="786384" cy="219456"/>
           </a:xfrm>
           <a:prstGeom prst="rect">
             <a:avLst/>
@@ -5443,11 +5952,11 @@
           <a:p>
             <a:pPr algn="ctr"/>
             <a:r>
-              <a:rPr sz="760" b="1">
-                <a:solidFill>
-                  <a:srgbClr val="1E2732"/>
-                </a:solidFill>
-                <a:latin typeface="Aptos"/>
+              <a:rPr sz="840" b="1">
+                <a:solidFill>
+                  <a:srgbClr val="24465D"/>
+                </a:solidFill>
+                <a:latin typeface="Arial"/>
               </a:rPr>
               <a:t>W23–24</a:t>
             </a:r>
@@ -5456,14 +5965,14 @@
       </p:sp>
       <p:sp>
         <p:nvSpPr>
-          <p:cNvPr id="64" name="TextBox 63"/>
+          <p:cNvPr id="77" name="TextBox 76"/>
           <p:cNvSpPr txBox="1"/>
           <p:nvPr/>
         </p:nvSpPr>
         <p:spPr>
           <a:xfrm>
-            <a:off x="9656064" y="3072384"/>
-            <a:ext cx="1005840" cy="182880"/>
+            <a:off x="8796528" y="320040"/>
+            <a:ext cx="1664208" cy="246888"/>
           </a:xfrm>
           <a:prstGeom prst="rect">
             <a:avLst/>
@@ -5476,48 +5985,13 @@
           </a:bodyPr>
           <a:lstStyle/>
           <a:p>
-            <a:pPr algn="ctr"/>
-            <a:r>
-              <a:rPr sz="700" b="0">
-                <a:solidFill>
-                  <a:srgbClr val="5E6875"/>
-                </a:solidFill>
-                <a:latin typeface="Aptos"/>
-              </a:rPr>
-              <a:t>Late difficult tasks</a:t>
-            </a:r>
-          </a:p>
-        </p:txBody>
-      </p:sp>
-      <p:sp>
-        <p:nvSpPr>
-          <p:cNvPr id="65" name="TextBox 64"/>
-          <p:cNvSpPr txBox="1"/>
-          <p:nvPr/>
-        </p:nvSpPr>
-        <p:spPr>
-          <a:xfrm>
-            <a:off x="8796528" y="1143000"/>
-            <a:ext cx="1664208" cy="246888"/>
-          </a:xfrm>
-          <a:prstGeom prst="rect">
-            <a:avLst/>
-          </a:prstGeom>
-          <a:noFill/>
-        </p:spPr>
-        <p:txBody>
-          <a:bodyPr wrap="none" lIns="18288" rIns="18288" tIns="18288" bIns="18288" anchor="ctr">
-            <a:spAutoFit/>
-          </a:bodyPr>
-          <a:lstStyle/>
-          <a:p>
             <a:pPr algn="r"/>
             <a:r>
               <a:rPr sz="910" b="1">
                 <a:solidFill>
                   <a:srgbClr val="315BCE"/>
                 </a:solidFill>
-                <a:latin typeface="Aptos"/>
+                <a:latin typeface="Arial"/>
               </a:rPr>
               <a:t>Start-up → mature: −21%</a:t>
             </a:r>
@@ -5526,59 +6000,24 @@
       </p:sp>
       <p:sp>
         <p:nvSpPr>
-          <p:cNvPr id="66" name="TextBox 65"/>
-          <p:cNvSpPr txBox="1"/>
-          <p:nvPr/>
-        </p:nvSpPr>
-        <p:spPr>
-          <a:xfrm>
-            <a:off x="3931920" y="1389888"/>
-            <a:ext cx="1920240" cy="201168"/>
-          </a:xfrm>
-          <a:prstGeom prst="rect">
-            <a:avLst/>
-          </a:prstGeom>
-          <a:noFill/>
-        </p:spPr>
-        <p:txBody>
-          <a:bodyPr wrap="none" lIns="18288" rIns="18288" tIns="18288" bIns="18288" anchor="ctr">
-            <a:spAutoFit/>
-          </a:bodyPr>
-          <a:lstStyle/>
-          <a:p>
-            <a:pPr algn="l"/>
-            <a:r>
-              <a:rPr sz="780" b="0">
-                <a:solidFill>
-                  <a:srgbClr val="5E6875"/>
-                </a:solidFill>
-                <a:latin typeface="Aptos"/>
-              </a:rPr>
-              <a:t>Best six-wave regime: −50%</a:t>
-            </a:r>
-          </a:p>
-        </p:txBody>
-      </p:sp>
-      <p:sp>
-        <p:nvSpPr>
-          <p:cNvPr id="67" name="Rounded Rectangle 66"/>
+          <p:cNvPr id="78" name="Rounded Rectangle 77"/>
           <p:cNvSpPr/>
           <p:nvPr/>
         </p:nvSpPr>
         <p:spPr>
           <a:xfrm>
-            <a:off x="3429000" y="3474720"/>
-            <a:ext cx="7223760" cy="2194560"/>
+            <a:off x="3429000" y="2606040"/>
+            <a:ext cx="7223760" cy="2057400"/>
           </a:xfrm>
           <a:prstGeom prst="roundRect">
             <a:avLst/>
           </a:prstGeom>
           <a:solidFill>
-            <a:srgbClr val="FFFFFF"/>
+            <a:srgbClr val="FFFDF8"/>
           </a:solidFill>
           <a:ln w="10160">
             <a:solidFill>
-              <a:srgbClr val="DBE1E7"/>
+              <a:srgbClr val="D8E0E8"/>
             </a:solidFill>
           </a:ln>
           <a:effectLst/>
@@ -5607,13 +6046,13 @@
       </p:sp>
       <p:sp>
         <p:nvSpPr>
-          <p:cNvPr id="68" name="TextBox 67"/>
+          <p:cNvPr id="79" name="TextBox 78"/>
           <p:cNvSpPr txBox="1"/>
           <p:nvPr/>
         </p:nvSpPr>
         <p:spPr>
           <a:xfrm>
-            <a:off x="3575304" y="3547872"/>
+            <a:off x="3575304" y="2679192"/>
             <a:ext cx="6931152" cy="274320"/>
           </a:xfrm>
           <a:prstGeom prst="rect">
@@ -5629,27 +6068,27 @@
           <a:p>
             <a:pPr algn="l"/>
             <a:r>
-              <a:rPr sz="1150" b="1">
+              <a:rPr sz="1019" b="1">
                 <a:solidFill>
                   <a:srgbClr val="173B70"/>
                 </a:solidFill>
-                <a:latin typeface="Aptos"/>
+                <a:latin typeface="Arial"/>
               </a:rPr>
-              <a:t>(c) Argus active workflow time per task</a:t>
-            </a:r>
-          </a:p>
-        </p:txBody>
-      </p:sp>
-      <p:sp>
-        <p:nvSpPr>
-          <p:cNvPr id="69" name="Rectangle 68"/>
+              <a:t>(c) Active time / task</a:t>
+            </a:r>
+          </a:p>
+        </p:txBody>
+      </p:sp>
+      <p:sp>
+        <p:nvSpPr>
+          <p:cNvPr id="80" name="Rectangle 79"/>
           <p:cNvSpPr/>
           <p:nvPr/>
         </p:nvSpPr>
         <p:spPr>
           <a:xfrm>
-            <a:off x="9838944" y="3913631"/>
-            <a:ext cx="640080" cy="1335024"/>
+            <a:off x="9838944" y="3044952"/>
+            <a:ext cx="640080" cy="1197864"/>
           </a:xfrm>
           <a:prstGeom prst="rect">
             <a:avLst/>
@@ -5688,13 +6127,13 @@
       </p:sp>
       <p:cxnSp>
         <p:nvCxnSpPr>
-          <p:cNvPr id="70" name="Connector 69"/>
+          <p:cNvPr id="81" name="Connector 80"/>
           <p:cNvCxnSpPr/>
           <p:nvPr/>
         </p:nvCxnSpPr>
         <p:spPr>
           <a:xfrm>
-            <a:off x="3941064" y="5248655"/>
+            <a:off x="3941064" y="4242816"/>
             <a:ext cx="6217920" cy="0"/>
           </a:xfrm>
           <a:prstGeom prst="line">
@@ -5702,7 +6141,7 @@
           </a:prstGeom>
           <a:ln w="8255">
             <a:solidFill>
-              <a:srgbClr val="DBE1E7"/>
+              <a:srgbClr val="D8E0E8"/>
             </a:solidFill>
           </a:ln>
         </p:spPr>
@@ -5723,13 +6162,13 @@
       </p:cxnSp>
       <p:sp>
         <p:nvSpPr>
-          <p:cNvPr id="71" name="TextBox 70"/>
+          <p:cNvPr id="82" name="TextBox 81"/>
           <p:cNvSpPr txBox="1"/>
           <p:nvPr/>
         </p:nvSpPr>
         <p:spPr>
           <a:xfrm>
-            <a:off x="3502152" y="5148071"/>
+            <a:off x="3502152" y="4142232"/>
             <a:ext cx="347472" cy="201168"/>
           </a:xfrm>
           <a:prstGeom prst="rect">
@@ -5747,9 +6186,9 @@
             <a:r>
               <a:rPr sz="750" b="0">
                 <a:solidFill>
-                  <a:srgbClr val="5E6875"/>
-                </a:solidFill>
-                <a:latin typeface="Aptos"/>
+                  <a:srgbClr val="66717D"/>
+                </a:solidFill>
+                <a:latin typeface="Arial"/>
               </a:rPr>
               <a:t>0</a:t>
             </a:r>
@@ -5758,13 +6197,13 @@
       </p:sp>
       <p:cxnSp>
         <p:nvCxnSpPr>
-          <p:cNvPr id="72" name="Connector 71"/>
+          <p:cNvPr id="83" name="Connector 82"/>
           <p:cNvCxnSpPr/>
           <p:nvPr/>
         </p:nvCxnSpPr>
         <p:spPr>
           <a:xfrm>
-            <a:off x="3941064" y="5026151"/>
+            <a:off x="3941064" y="4043172"/>
             <a:ext cx="6217920" cy="0"/>
           </a:xfrm>
           <a:prstGeom prst="line">
@@ -5772,7 +6211,7 @@
           </a:prstGeom>
           <a:ln w="8255">
             <a:solidFill>
-              <a:srgbClr val="DBE1E7"/>
+              <a:srgbClr val="D8E0E8"/>
             </a:solidFill>
           </a:ln>
         </p:spPr>
@@ -5793,13 +6232,13 @@
       </p:cxnSp>
       <p:sp>
         <p:nvSpPr>
-          <p:cNvPr id="73" name="TextBox 72"/>
+          <p:cNvPr id="84" name="TextBox 83"/>
           <p:cNvSpPr txBox="1"/>
           <p:nvPr/>
         </p:nvSpPr>
         <p:spPr>
           <a:xfrm>
-            <a:off x="3502152" y="4925567"/>
+            <a:off x="3502152" y="3942588"/>
             <a:ext cx="347472" cy="201168"/>
           </a:xfrm>
           <a:prstGeom prst="rect">
@@ -5817,9 +6256,9 @@
             <a:r>
               <a:rPr sz="750" b="0">
                 <a:solidFill>
-                  <a:srgbClr val="5E6875"/>
-                </a:solidFill>
-                <a:latin typeface="Aptos"/>
+                  <a:srgbClr val="66717D"/>
+                </a:solidFill>
+                <a:latin typeface="Arial"/>
               </a:rPr>
               <a:t>2</a:t>
             </a:r>
@@ -5828,13 +6267,13 @@
       </p:sp>
       <p:cxnSp>
         <p:nvCxnSpPr>
-          <p:cNvPr id="74" name="Connector 73"/>
+          <p:cNvPr id="85" name="Connector 84"/>
           <p:cNvCxnSpPr/>
           <p:nvPr/>
         </p:nvCxnSpPr>
         <p:spPr>
           <a:xfrm>
-            <a:off x="3941064" y="4803648"/>
+            <a:off x="3941064" y="3843528"/>
             <a:ext cx="6217920" cy="0"/>
           </a:xfrm>
           <a:prstGeom prst="line">
@@ -5842,7 +6281,7 @@
           </a:prstGeom>
           <a:ln w="8255">
             <a:solidFill>
-              <a:srgbClr val="DBE1E7"/>
+              <a:srgbClr val="D8E0E8"/>
             </a:solidFill>
           </a:ln>
         </p:spPr>
@@ -5863,13 +6302,13 @@
       </p:cxnSp>
       <p:sp>
         <p:nvSpPr>
-          <p:cNvPr id="75" name="TextBox 74"/>
+          <p:cNvPr id="86" name="TextBox 85"/>
           <p:cNvSpPr txBox="1"/>
           <p:nvPr/>
         </p:nvSpPr>
         <p:spPr>
           <a:xfrm>
-            <a:off x="3502152" y="4703063"/>
+            <a:off x="3502152" y="3742944"/>
             <a:ext cx="347472" cy="201168"/>
           </a:xfrm>
           <a:prstGeom prst="rect">
@@ -5887,9 +6326,9 @@
             <a:r>
               <a:rPr sz="750" b="0">
                 <a:solidFill>
-                  <a:srgbClr val="5E6875"/>
-                </a:solidFill>
-                <a:latin typeface="Aptos"/>
+                  <a:srgbClr val="66717D"/>
+                </a:solidFill>
+                <a:latin typeface="Arial"/>
               </a:rPr>
               <a:t>4</a:t>
             </a:r>
@@ -5898,13 +6337,13 @@
       </p:sp>
       <p:cxnSp>
         <p:nvCxnSpPr>
-          <p:cNvPr id="76" name="Connector 75"/>
+          <p:cNvPr id="87" name="Connector 86"/>
           <p:cNvCxnSpPr/>
           <p:nvPr/>
         </p:nvCxnSpPr>
         <p:spPr>
           <a:xfrm>
-            <a:off x="3941064" y="4581144"/>
+            <a:off x="3941064" y="3643884"/>
             <a:ext cx="6217920" cy="0"/>
           </a:xfrm>
           <a:prstGeom prst="line">
@@ -5912,7 +6351,7 @@
           </a:prstGeom>
           <a:ln w="8255">
             <a:solidFill>
-              <a:srgbClr val="DBE1E7"/>
+              <a:srgbClr val="D8E0E8"/>
             </a:solidFill>
           </a:ln>
         </p:spPr>
@@ -5933,13 +6372,13 @@
       </p:cxnSp>
       <p:sp>
         <p:nvSpPr>
-          <p:cNvPr id="77" name="TextBox 76"/>
+          <p:cNvPr id="88" name="TextBox 87"/>
           <p:cNvSpPr txBox="1"/>
           <p:nvPr/>
         </p:nvSpPr>
         <p:spPr>
           <a:xfrm>
-            <a:off x="3502152" y="4480559"/>
+            <a:off x="3502152" y="3543300"/>
             <a:ext cx="347472" cy="201168"/>
           </a:xfrm>
           <a:prstGeom prst="rect">
@@ -5957,9 +6396,9 @@
             <a:r>
               <a:rPr sz="750" b="0">
                 <a:solidFill>
-                  <a:srgbClr val="5E6875"/>
-                </a:solidFill>
-                <a:latin typeface="Aptos"/>
+                  <a:srgbClr val="66717D"/>
+                </a:solidFill>
+                <a:latin typeface="Arial"/>
               </a:rPr>
               <a:t>6</a:t>
             </a:r>
@@ -5968,13 +6407,13 @@
       </p:sp>
       <p:cxnSp>
         <p:nvCxnSpPr>
-          <p:cNvPr id="78" name="Connector 77"/>
+          <p:cNvPr id="89" name="Connector 88"/>
           <p:cNvCxnSpPr/>
           <p:nvPr/>
         </p:nvCxnSpPr>
         <p:spPr>
           <a:xfrm>
-            <a:off x="3941064" y="4358639"/>
+            <a:off x="3941064" y="3444240"/>
             <a:ext cx="6217920" cy="0"/>
           </a:xfrm>
           <a:prstGeom prst="line">
@@ -5982,7 +6421,7 @@
           </a:prstGeom>
           <a:ln w="8255">
             <a:solidFill>
-              <a:srgbClr val="DBE1E7"/>
+              <a:srgbClr val="D8E0E8"/>
             </a:solidFill>
           </a:ln>
         </p:spPr>
@@ -6003,13 +6442,13 @@
       </p:cxnSp>
       <p:sp>
         <p:nvSpPr>
-          <p:cNvPr id="79" name="TextBox 78"/>
+          <p:cNvPr id="90" name="TextBox 89"/>
           <p:cNvSpPr txBox="1"/>
           <p:nvPr/>
         </p:nvSpPr>
         <p:spPr>
           <a:xfrm>
-            <a:off x="3502152" y="4258055"/>
+            <a:off x="3502152" y="3343656"/>
             <a:ext cx="347472" cy="201168"/>
           </a:xfrm>
           <a:prstGeom prst="rect">
@@ -6027,9 +6466,9 @@
             <a:r>
               <a:rPr sz="750" b="0">
                 <a:solidFill>
-                  <a:srgbClr val="5E6875"/>
-                </a:solidFill>
-                <a:latin typeface="Aptos"/>
+                  <a:srgbClr val="66717D"/>
+                </a:solidFill>
+                <a:latin typeface="Arial"/>
               </a:rPr>
               <a:t>8</a:t>
             </a:r>
@@ -6038,13 +6477,13 @@
       </p:sp>
       <p:cxnSp>
         <p:nvCxnSpPr>
-          <p:cNvPr id="80" name="Connector 79"/>
+          <p:cNvPr id="91" name="Connector 90"/>
           <p:cNvCxnSpPr/>
           <p:nvPr/>
         </p:nvCxnSpPr>
         <p:spPr>
           <a:xfrm>
-            <a:off x="3941064" y="4136135"/>
+            <a:off x="3941064" y="3244596"/>
             <a:ext cx="6217920" cy="0"/>
           </a:xfrm>
           <a:prstGeom prst="line">
@@ -6052,7 +6491,7 @@
           </a:prstGeom>
           <a:ln w="8255">
             <a:solidFill>
-              <a:srgbClr val="DBE1E7"/>
+              <a:srgbClr val="D8E0E8"/>
             </a:solidFill>
           </a:ln>
         </p:spPr>
@@ -6073,13 +6512,13 @@
       </p:cxnSp>
       <p:sp>
         <p:nvSpPr>
-          <p:cNvPr id="81" name="TextBox 80"/>
+          <p:cNvPr id="92" name="TextBox 91"/>
           <p:cNvSpPr txBox="1"/>
           <p:nvPr/>
         </p:nvSpPr>
         <p:spPr>
           <a:xfrm>
-            <a:off x="3502152" y="4035551"/>
+            <a:off x="3502152" y="3144012"/>
             <a:ext cx="347472" cy="201168"/>
           </a:xfrm>
           <a:prstGeom prst="rect">
@@ -6097,9 +6536,9 @@
             <a:r>
               <a:rPr sz="750" b="0">
                 <a:solidFill>
-                  <a:srgbClr val="5E6875"/>
-                </a:solidFill>
-                <a:latin typeface="Aptos"/>
+                  <a:srgbClr val="66717D"/>
+                </a:solidFill>
+                <a:latin typeface="Arial"/>
               </a:rPr>
               <a:t>10</a:t>
             </a:r>
@@ -6108,13 +6547,13 @@
       </p:sp>
       <p:cxnSp>
         <p:nvCxnSpPr>
-          <p:cNvPr id="82" name="Connector 81"/>
+          <p:cNvPr id="93" name="Connector 92"/>
           <p:cNvCxnSpPr/>
           <p:nvPr/>
         </p:nvCxnSpPr>
         <p:spPr>
           <a:xfrm>
-            <a:off x="3941064" y="3913631"/>
+            <a:off x="3941064" y="3044952"/>
             <a:ext cx="6217920" cy="0"/>
           </a:xfrm>
           <a:prstGeom prst="line">
@@ -6122,7 +6561,7 @@
           </a:prstGeom>
           <a:ln w="8255">
             <a:solidFill>
-              <a:srgbClr val="DBE1E7"/>
+              <a:srgbClr val="D8E0E8"/>
             </a:solidFill>
           </a:ln>
         </p:spPr>
@@ -6143,13 +6582,13 @@
       </p:cxnSp>
       <p:sp>
         <p:nvSpPr>
-          <p:cNvPr id="83" name="TextBox 82"/>
+          <p:cNvPr id="94" name="TextBox 93"/>
           <p:cNvSpPr txBox="1"/>
           <p:nvPr/>
         </p:nvSpPr>
         <p:spPr>
           <a:xfrm>
-            <a:off x="3502152" y="3813047"/>
+            <a:off x="3502152" y="2944368"/>
             <a:ext cx="347472" cy="201168"/>
           </a:xfrm>
           <a:prstGeom prst="rect">
@@ -6167,9 +6606,9 @@
             <a:r>
               <a:rPr sz="750" b="0">
                 <a:solidFill>
-                  <a:srgbClr val="5E6875"/>
-                </a:solidFill>
-                <a:latin typeface="Aptos"/>
+                  <a:srgbClr val="66717D"/>
+                </a:solidFill>
+                <a:latin typeface="Arial"/>
               </a:rPr>
               <a:t>12</a:t>
             </a:r>
@@ -6178,13 +6617,13 @@
       </p:sp>
       <p:sp>
         <p:nvSpPr>
-          <p:cNvPr id="84" name="Oval 83"/>
+          <p:cNvPr id="95" name="Oval 94"/>
           <p:cNvSpPr/>
           <p:nvPr/>
         </p:nvSpPr>
         <p:spPr>
           <a:xfrm>
-            <a:off x="3872484" y="4232187"/>
+            <a:off x="3872484" y="3323733"/>
             <a:ext cx="137160" cy="137160"/>
           </a:xfrm>
           <a:prstGeom prst="ellipse">
@@ -6195,7 +6634,7 @@
           </a:solidFill>
           <a:ln w="12700">
             <a:solidFill>
-              <a:srgbClr val="FFFFFF"/>
+              <a:srgbClr val="FFFDF8"/>
             </a:solidFill>
           </a:ln>
           <a:effectLst/>
@@ -6224,13 +6663,13 @@
       </p:sp>
       <p:sp>
         <p:nvSpPr>
-          <p:cNvPr id="85" name="TextBox 84"/>
+          <p:cNvPr id="96" name="TextBox 95"/>
           <p:cNvSpPr txBox="1"/>
           <p:nvPr/>
         </p:nvSpPr>
         <p:spPr>
           <a:xfrm>
-            <a:off x="3621024" y="4008159"/>
+            <a:off x="3621024" y="3099705"/>
             <a:ext cx="640080" cy="201168"/>
           </a:xfrm>
           <a:prstGeom prst="rect">
@@ -6250,7 +6689,7 @@
                 <a:solidFill>
                   <a:srgbClr val="315BCE"/>
                 </a:solidFill>
-                <a:latin typeface="Aptos"/>
+                <a:latin typeface="Arial"/>
               </a:rPr>
               <a:t>8.52m</a:t>
             </a:r>
@@ -6259,14 +6698,14 @@
       </p:sp>
       <p:sp>
         <p:nvSpPr>
-          <p:cNvPr id="86" name="TextBox 85"/>
+          <p:cNvPr id="97" name="TextBox 96"/>
           <p:cNvSpPr txBox="1"/>
           <p:nvPr/>
         </p:nvSpPr>
         <p:spPr>
           <a:xfrm>
-            <a:off x="3547872" y="5312664"/>
-            <a:ext cx="786384" cy="182880"/>
+            <a:off x="3547872" y="4334256"/>
+            <a:ext cx="786384" cy="219456"/>
           </a:xfrm>
           <a:prstGeom prst="rect">
             <a:avLst/>
@@ -6281,62 +6720,27 @@
           <a:p>
             <a:pPr algn="ctr"/>
             <a:r>
-              <a:rPr sz="760" b="1">
-                <a:solidFill>
-                  <a:srgbClr val="1E2732"/>
-                </a:solidFill>
-                <a:latin typeface="Aptos"/>
+              <a:rPr sz="840" b="1">
+                <a:solidFill>
+                  <a:srgbClr val="24465D"/>
+                </a:solidFill>
+                <a:latin typeface="Arial"/>
               </a:rPr>
               <a:t>W1–6</a:t>
             </a:r>
           </a:p>
         </p:txBody>
       </p:sp>
-      <p:sp>
-        <p:nvSpPr>
-          <p:cNvPr id="87" name="TextBox 86"/>
-          <p:cNvSpPr txBox="1"/>
-          <p:nvPr/>
-        </p:nvSpPr>
-        <p:spPr>
-          <a:xfrm>
-            <a:off x="3438144" y="5495544"/>
-            <a:ext cx="1005840" cy="182880"/>
-          </a:xfrm>
-          <a:prstGeom prst="rect">
-            <a:avLst/>
-          </a:prstGeom>
-          <a:noFill/>
-        </p:spPr>
-        <p:txBody>
-          <a:bodyPr wrap="none" lIns="18288" rIns="18288" tIns="18288" bIns="18288" anchor="ctr">
-            <a:spAutoFit/>
-          </a:bodyPr>
-          <a:lstStyle/>
-          <a:p>
-            <a:pPr algn="ctr"/>
-            <a:r>
-              <a:rPr sz="700" b="0">
-                <a:solidFill>
-                  <a:srgbClr val="5E6875"/>
-                </a:solidFill>
-                <a:latin typeface="Aptos"/>
-              </a:rPr>
-              <a:t>Start-up</a:t>
-            </a:r>
-          </a:p>
-        </p:txBody>
-      </p:sp>
       <p:cxnSp>
         <p:nvCxnSpPr>
-          <p:cNvPr id="88" name="Connector 87"/>
+          <p:cNvPr id="98" name="Connector 97"/>
           <p:cNvCxnSpPr/>
           <p:nvPr/>
         </p:nvCxnSpPr>
         <p:spPr>
           <a:xfrm>
-            <a:off x="3941064" y="4300767"/>
-            <a:ext cx="1554480" cy="138228"/>
+            <a:off x="3941064" y="3392313"/>
+            <a:ext cx="1554480" cy="124027"/>
           </a:xfrm>
           <a:prstGeom prst="line">
             <a:avLst/>
@@ -6364,13 +6768,13 @@
       </p:cxnSp>
       <p:sp>
         <p:nvSpPr>
-          <p:cNvPr id="89" name="Oval 88"/>
+          <p:cNvPr id="99" name="Oval 98"/>
           <p:cNvSpPr/>
           <p:nvPr/>
         </p:nvSpPr>
         <p:spPr>
           <a:xfrm>
-            <a:off x="5426964" y="4370415"/>
+            <a:off x="5426964" y="3447760"/>
             <a:ext cx="137160" cy="137160"/>
           </a:xfrm>
           <a:prstGeom prst="ellipse">
@@ -6381,7 +6785,7 @@
           </a:solidFill>
           <a:ln w="12700">
             <a:solidFill>
-              <a:srgbClr val="FFFFFF"/>
+              <a:srgbClr val="FFFDF8"/>
             </a:solidFill>
           </a:ln>
           <a:effectLst/>
@@ -6410,13 +6814,13 @@
       </p:sp>
       <p:sp>
         <p:nvSpPr>
-          <p:cNvPr id="90" name="TextBox 89"/>
+          <p:cNvPr id="100" name="TextBox 99"/>
           <p:cNvSpPr txBox="1"/>
           <p:nvPr/>
         </p:nvSpPr>
         <p:spPr>
           <a:xfrm>
-            <a:off x="5175504" y="4146387"/>
+            <a:off x="5175504" y="3223732"/>
             <a:ext cx="640080" cy="201168"/>
           </a:xfrm>
           <a:prstGeom prst="rect">
@@ -6436,7 +6840,7 @@
                 <a:solidFill>
                   <a:srgbClr val="315BCE"/>
                 </a:solidFill>
-                <a:latin typeface="Aptos"/>
+                <a:latin typeface="Arial"/>
               </a:rPr>
               <a:t>7.28m</a:t>
             </a:r>
@@ -6445,14 +6849,14 @@
       </p:sp>
       <p:sp>
         <p:nvSpPr>
-          <p:cNvPr id="91" name="TextBox 90"/>
+          <p:cNvPr id="101" name="TextBox 100"/>
           <p:cNvSpPr txBox="1"/>
           <p:nvPr/>
         </p:nvSpPr>
         <p:spPr>
           <a:xfrm>
-            <a:off x="5102352" y="5312664"/>
-            <a:ext cx="786384" cy="182880"/>
+            <a:off x="5102352" y="4334256"/>
+            <a:ext cx="786384" cy="219456"/>
           </a:xfrm>
           <a:prstGeom prst="rect">
             <a:avLst/>
@@ -6467,62 +6871,27 @@
           <a:p>
             <a:pPr algn="ctr"/>
             <a:r>
-              <a:rPr sz="760" b="1">
-                <a:solidFill>
-                  <a:srgbClr val="1E2732"/>
-                </a:solidFill>
-                <a:latin typeface="Aptos"/>
+              <a:rPr sz="840" b="1">
+                <a:solidFill>
+                  <a:srgbClr val="24465D"/>
+                </a:solidFill>
+                <a:latin typeface="Arial"/>
               </a:rPr>
               <a:t>W7–12</a:t>
             </a:r>
           </a:p>
         </p:txBody>
       </p:sp>
-      <p:sp>
-        <p:nvSpPr>
-          <p:cNvPr id="92" name="TextBox 91"/>
-          <p:cNvSpPr txBox="1"/>
-          <p:nvPr/>
-        </p:nvSpPr>
-        <p:spPr>
-          <a:xfrm>
-            <a:off x="4992624" y="5495544"/>
-            <a:ext cx="1005840" cy="182880"/>
-          </a:xfrm>
-          <a:prstGeom prst="rect">
-            <a:avLst/>
-          </a:prstGeom>
-          <a:noFill/>
-        </p:spPr>
-        <p:txBody>
-          <a:bodyPr wrap="none" lIns="18288" rIns="18288" tIns="18288" bIns="18288" anchor="ctr">
-            <a:spAutoFit/>
-          </a:bodyPr>
-          <a:lstStyle/>
-          <a:p>
-            <a:pPr algn="ctr"/>
-            <a:r>
-              <a:rPr sz="700" b="0">
-                <a:solidFill>
-                  <a:srgbClr val="5E6875"/>
-                </a:solidFill>
-                <a:latin typeface="Aptos"/>
-              </a:rPr>
-              <a:t>Early reuse</a:t>
-            </a:r>
-          </a:p>
-        </p:txBody>
-      </p:sp>
       <p:cxnSp>
         <p:nvCxnSpPr>
-          <p:cNvPr id="93" name="Connector 92"/>
+          <p:cNvPr id="102" name="Connector 101"/>
           <p:cNvCxnSpPr/>
           <p:nvPr/>
         </p:nvCxnSpPr>
         <p:spPr>
           <a:xfrm flipV="1">
-            <a:off x="5495544" y="4089287"/>
-            <a:ext cx="1554480" cy="349708"/>
+            <a:off x="5495544" y="3202561"/>
+            <a:ext cx="1554480" cy="313779"/>
           </a:xfrm>
           <a:prstGeom prst="line">
             <a:avLst/>
@@ -6550,13 +6919,13 @@
       </p:cxnSp>
       <p:sp>
         <p:nvSpPr>
-          <p:cNvPr id="94" name="Oval 93"/>
+          <p:cNvPr id="103" name="Oval 102"/>
           <p:cNvSpPr/>
           <p:nvPr/>
         </p:nvSpPr>
         <p:spPr>
           <a:xfrm>
-            <a:off x="6981444" y="4020707"/>
+            <a:off x="6981444" y="3133981"/>
             <a:ext cx="137160" cy="137160"/>
           </a:xfrm>
           <a:prstGeom prst="ellipse">
@@ -6567,7 +6936,7 @@
           </a:solidFill>
           <a:ln w="12700">
             <a:solidFill>
-              <a:srgbClr val="FFFFFF"/>
+              <a:srgbClr val="FFFDF8"/>
             </a:solidFill>
           </a:ln>
           <a:effectLst/>
@@ -6596,13 +6965,13 @@
       </p:sp>
       <p:sp>
         <p:nvSpPr>
-          <p:cNvPr id="95" name="TextBox 94"/>
+          <p:cNvPr id="104" name="TextBox 103"/>
           <p:cNvSpPr txBox="1"/>
           <p:nvPr/>
         </p:nvSpPr>
         <p:spPr>
           <a:xfrm>
-            <a:off x="6729984" y="3796679"/>
+            <a:off x="6729984" y="2909953"/>
             <a:ext cx="640080" cy="201168"/>
           </a:xfrm>
           <a:prstGeom prst="rect">
@@ -6622,7 +6991,7 @@
                 <a:solidFill>
                   <a:srgbClr val="315BCE"/>
                 </a:solidFill>
-                <a:latin typeface="Aptos"/>
+                <a:latin typeface="Arial"/>
               </a:rPr>
               <a:t>10.42m</a:t>
             </a:r>
@@ -6631,14 +7000,14 @@
       </p:sp>
       <p:sp>
         <p:nvSpPr>
-          <p:cNvPr id="96" name="TextBox 95"/>
+          <p:cNvPr id="105" name="TextBox 104"/>
           <p:cNvSpPr txBox="1"/>
           <p:nvPr/>
         </p:nvSpPr>
         <p:spPr>
           <a:xfrm>
-            <a:off x="6656832" y="5312664"/>
-            <a:ext cx="786384" cy="182880"/>
+            <a:off x="6656832" y="4334256"/>
+            <a:ext cx="786384" cy="219456"/>
           </a:xfrm>
           <a:prstGeom prst="rect">
             <a:avLst/>
@@ -6653,62 +7022,27 @@
           <a:p>
             <a:pPr algn="ctr"/>
             <a:r>
-              <a:rPr sz="760" b="1">
-                <a:solidFill>
-                  <a:srgbClr val="1E2732"/>
-                </a:solidFill>
-                <a:latin typeface="Aptos"/>
+              <a:rPr sz="840" b="1">
+                <a:solidFill>
+                  <a:srgbClr val="24465D"/>
+                </a:solidFill>
+                <a:latin typeface="Arial"/>
               </a:rPr>
               <a:t>W13–18</a:t>
             </a:r>
           </a:p>
         </p:txBody>
       </p:sp>
-      <p:sp>
-        <p:nvSpPr>
-          <p:cNvPr id="97" name="TextBox 96"/>
-          <p:cNvSpPr txBox="1"/>
-          <p:nvPr/>
-        </p:nvSpPr>
-        <p:spPr>
-          <a:xfrm>
-            <a:off x="6547104" y="5495544"/>
-            <a:ext cx="1005840" cy="182880"/>
-          </a:xfrm>
-          <a:prstGeom prst="rect">
-            <a:avLst/>
-          </a:prstGeom>
-          <a:noFill/>
-        </p:spPr>
-        <p:txBody>
-          <a:bodyPr wrap="none" lIns="18288" rIns="18288" tIns="18288" bIns="18288" anchor="ctr">
-            <a:spAutoFit/>
-          </a:bodyPr>
-          <a:lstStyle/>
-          <a:p>
-            <a:pPr algn="ctr"/>
-            <a:r>
-              <a:rPr sz="700" b="0">
-                <a:solidFill>
-                  <a:srgbClr val="5E6875"/>
-                </a:solidFill>
-                <a:latin typeface="Aptos"/>
-              </a:rPr>
-              <a:t>Composition shift</a:t>
-            </a:r>
-          </a:p>
-        </p:txBody>
-      </p:sp>
       <p:cxnSp>
         <p:nvCxnSpPr>
-          <p:cNvPr id="98" name="Connector 97"/>
+          <p:cNvPr id="106" name="Connector 105"/>
           <p:cNvCxnSpPr/>
           <p:nvPr/>
         </p:nvCxnSpPr>
         <p:spPr>
           <a:xfrm>
-            <a:off x="7050024" y="4089287"/>
-            <a:ext cx="1554480" cy="352912"/>
+            <a:off x="7050024" y="3202561"/>
+            <a:ext cx="1554480" cy="316653"/>
           </a:xfrm>
           <a:prstGeom prst="line">
             <a:avLst/>
@@ -6736,13 +7070,13 @@
       </p:cxnSp>
       <p:sp>
         <p:nvSpPr>
-          <p:cNvPr id="99" name="Oval 98"/>
+          <p:cNvPr id="107" name="Oval 106"/>
           <p:cNvSpPr/>
           <p:nvPr/>
         </p:nvSpPr>
         <p:spPr>
           <a:xfrm>
-            <a:off x="8535924" y="4373619"/>
+            <a:off x="8535924" y="3450634"/>
             <a:ext cx="137160" cy="137160"/>
           </a:xfrm>
           <a:prstGeom prst="ellipse">
@@ -6753,7 +7087,7 @@
           </a:solidFill>
           <a:ln w="12700">
             <a:solidFill>
-              <a:srgbClr val="FFFFFF"/>
+              <a:srgbClr val="FFFDF8"/>
             </a:solidFill>
           </a:ln>
           <a:effectLst/>
@@ -6782,13 +7116,13 @@
       </p:sp>
       <p:sp>
         <p:nvSpPr>
-          <p:cNvPr id="100" name="TextBox 99"/>
+          <p:cNvPr id="108" name="TextBox 107"/>
           <p:cNvSpPr txBox="1"/>
           <p:nvPr/>
         </p:nvSpPr>
         <p:spPr>
           <a:xfrm>
-            <a:off x="8284464" y="4149591"/>
+            <a:off x="8284464" y="3226606"/>
             <a:ext cx="640080" cy="201168"/>
           </a:xfrm>
           <a:prstGeom prst="rect">
@@ -6808,7 +7142,7 @@
                 <a:solidFill>
                   <a:srgbClr val="315BCE"/>
                 </a:solidFill>
-                <a:latin typeface="Aptos"/>
+                <a:latin typeface="Arial"/>
               </a:rPr>
               <a:t>7.25m</a:t>
             </a:r>
@@ -6817,14 +7151,14 @@
       </p:sp>
       <p:sp>
         <p:nvSpPr>
-          <p:cNvPr id="101" name="TextBox 100"/>
+          <p:cNvPr id="109" name="TextBox 108"/>
           <p:cNvSpPr txBox="1"/>
           <p:nvPr/>
         </p:nvSpPr>
         <p:spPr>
           <a:xfrm>
-            <a:off x="8211312" y="5312664"/>
-            <a:ext cx="786384" cy="182880"/>
+            <a:off x="8211312" y="4334256"/>
+            <a:ext cx="786384" cy="219456"/>
           </a:xfrm>
           <a:prstGeom prst="rect">
             <a:avLst/>
@@ -6839,62 +7173,27 @@
           <a:p>
             <a:pPr algn="ctr"/>
             <a:r>
-              <a:rPr sz="760" b="1">
-                <a:solidFill>
-                  <a:srgbClr val="1E2732"/>
-                </a:solidFill>
-                <a:latin typeface="Aptos"/>
+              <a:rPr sz="840" b="1">
+                <a:solidFill>
+                  <a:srgbClr val="24465D"/>
+                </a:solidFill>
+                <a:latin typeface="Arial"/>
               </a:rPr>
               <a:t>W19–22</a:t>
             </a:r>
           </a:p>
         </p:txBody>
       </p:sp>
-      <p:sp>
-        <p:nvSpPr>
-          <p:cNvPr id="102" name="TextBox 101"/>
-          <p:cNvSpPr txBox="1"/>
-          <p:nvPr/>
-        </p:nvSpPr>
-        <p:spPr>
-          <a:xfrm>
-            <a:off x="8101583" y="5495544"/>
-            <a:ext cx="1005840" cy="182880"/>
-          </a:xfrm>
-          <a:prstGeom prst="rect">
-            <a:avLst/>
-          </a:prstGeom>
-          <a:noFill/>
-        </p:spPr>
-        <p:txBody>
-          <a:bodyPr wrap="none" lIns="18288" rIns="18288" tIns="18288" bIns="18288" anchor="ctr">
-            <a:spAutoFit/>
-          </a:bodyPr>
-          <a:lstStyle/>
-          <a:p>
-            <a:pPr algn="ctr"/>
-            <a:r>
-              <a:rPr sz="700" b="0">
-                <a:solidFill>
-                  <a:srgbClr val="5E6875"/>
-                </a:solidFill>
-                <a:latin typeface="Aptos"/>
-              </a:rPr>
-              <a:t>Mature</a:t>
-            </a:r>
-          </a:p>
-        </p:txBody>
-      </p:sp>
       <p:cxnSp>
         <p:nvCxnSpPr>
-          <p:cNvPr id="103" name="Connector 102"/>
+          <p:cNvPr id="110" name="Connector 109"/>
           <p:cNvCxnSpPr/>
           <p:nvPr/>
         </p:nvCxnSpPr>
         <p:spPr>
           <a:xfrm flipV="1">
-            <a:off x="8604504" y="4245784"/>
-            <a:ext cx="1554480" cy="196415"/>
+            <a:off x="8604504" y="3342979"/>
+            <a:ext cx="1554480" cy="176235"/>
           </a:xfrm>
           <a:prstGeom prst="line">
             <a:avLst/>
@@ -6922,13 +7221,13 @@
       </p:cxnSp>
       <p:sp>
         <p:nvSpPr>
-          <p:cNvPr id="104" name="Oval 103"/>
+          <p:cNvPr id="111" name="Oval 110"/>
           <p:cNvSpPr/>
           <p:nvPr/>
         </p:nvSpPr>
         <p:spPr>
           <a:xfrm>
-            <a:off x="10090404" y="4177204"/>
+            <a:off x="10090404" y="3274399"/>
             <a:ext cx="137160" cy="137160"/>
           </a:xfrm>
           <a:prstGeom prst="ellipse">
@@ -6939,7 +7238,7 @@
           </a:solidFill>
           <a:ln w="12700">
             <a:solidFill>
-              <a:srgbClr val="FFFFFF"/>
+              <a:srgbClr val="FFFDF8"/>
             </a:solidFill>
           </a:ln>
           <a:effectLst/>
@@ -6968,13 +7267,13 @@
       </p:sp>
       <p:sp>
         <p:nvSpPr>
-          <p:cNvPr id="105" name="TextBox 104"/>
+          <p:cNvPr id="112" name="TextBox 111"/>
           <p:cNvSpPr txBox="1"/>
           <p:nvPr/>
         </p:nvSpPr>
         <p:spPr>
           <a:xfrm>
-            <a:off x="9838944" y="3953176"/>
+            <a:off x="9838944" y="3050371"/>
             <a:ext cx="640080" cy="201168"/>
           </a:xfrm>
           <a:prstGeom prst="rect">
@@ -6994,7 +7293,7 @@
                 <a:solidFill>
                   <a:srgbClr val="C38A20"/>
                 </a:solidFill>
-                <a:latin typeface="Aptos"/>
+                <a:latin typeface="Arial"/>
               </a:rPr>
               <a:t>9.01m</a:t>
             </a:r>
@@ -7003,14 +7302,14 @@
       </p:sp>
       <p:sp>
         <p:nvSpPr>
-          <p:cNvPr id="106" name="TextBox 105"/>
+          <p:cNvPr id="113" name="TextBox 112"/>
           <p:cNvSpPr txBox="1"/>
           <p:nvPr/>
         </p:nvSpPr>
         <p:spPr>
           <a:xfrm>
-            <a:off x="9765792" y="5312664"/>
-            <a:ext cx="786384" cy="182880"/>
+            <a:off x="9765792" y="4334256"/>
+            <a:ext cx="786384" cy="219456"/>
           </a:xfrm>
           <a:prstGeom prst="rect">
             <a:avLst/>
@@ -7025,11 +7324,11 @@
           <a:p>
             <a:pPr algn="ctr"/>
             <a:r>
-              <a:rPr sz="760" b="1">
-                <a:solidFill>
-                  <a:srgbClr val="1E2732"/>
-                </a:solidFill>
-                <a:latin typeface="Aptos"/>
+              <a:rPr sz="840" b="1">
+                <a:solidFill>
+                  <a:srgbClr val="24465D"/>
+                </a:solidFill>
+                <a:latin typeface="Arial"/>
               </a:rPr>
               <a:t>W23–24</a:t>
             </a:r>
@@ -7038,14 +7337,14 @@
       </p:sp>
       <p:sp>
         <p:nvSpPr>
-          <p:cNvPr id="107" name="TextBox 106"/>
+          <p:cNvPr id="114" name="TextBox 113"/>
           <p:cNvSpPr txBox="1"/>
           <p:nvPr/>
         </p:nvSpPr>
         <p:spPr>
           <a:xfrm>
-            <a:off x="9656064" y="5495544"/>
-            <a:ext cx="1005840" cy="182880"/>
+            <a:off x="8796528" y="2697480"/>
+            <a:ext cx="1664208" cy="246888"/>
           </a:xfrm>
           <a:prstGeom prst="rect">
             <a:avLst/>
@@ -7058,120 +7357,15 @@
           </a:bodyPr>
           <a:lstStyle/>
           <a:p>
-            <a:pPr algn="ctr"/>
-            <a:r>
-              <a:rPr sz="700" b="0">
-                <a:solidFill>
-                  <a:srgbClr val="5E6875"/>
-                </a:solidFill>
-                <a:latin typeface="Aptos"/>
-              </a:rPr>
-              <a:t>Late difficult tasks</a:t>
-            </a:r>
-          </a:p>
-        </p:txBody>
-      </p:sp>
-      <p:sp>
-        <p:nvSpPr>
-          <p:cNvPr id="108" name="TextBox 107"/>
-          <p:cNvSpPr txBox="1"/>
-          <p:nvPr/>
-        </p:nvSpPr>
-        <p:spPr>
-          <a:xfrm>
-            <a:off x="8796528" y="3566160"/>
-            <a:ext cx="1664208" cy="246888"/>
-          </a:xfrm>
-          <a:prstGeom prst="rect">
-            <a:avLst/>
-          </a:prstGeom>
-          <a:noFill/>
-        </p:spPr>
-        <p:txBody>
-          <a:bodyPr wrap="none" lIns="18288" rIns="18288" tIns="18288" bIns="18288" anchor="ctr">
-            <a:spAutoFit/>
-          </a:bodyPr>
-          <a:lstStyle/>
-          <a:p>
             <a:pPr algn="r"/>
             <a:r>
               <a:rPr sz="910" b="1">
                 <a:solidFill>
                   <a:srgbClr val="315BCE"/>
                 </a:solidFill>
-                <a:latin typeface="Aptos"/>
+                <a:latin typeface="Arial"/>
               </a:rPr>
               <a:t>Start-up → mature: −15%</a:t>
-            </a:r>
-          </a:p>
-        </p:txBody>
-      </p:sp>
-      <p:sp>
-        <p:nvSpPr>
-          <p:cNvPr id="109" name="TextBox 108"/>
-          <p:cNvSpPr txBox="1"/>
-          <p:nvPr/>
-        </p:nvSpPr>
-        <p:spPr>
-          <a:xfrm>
-            <a:off x="6528816" y="4199015"/>
-            <a:ext cx="1042415" cy="182880"/>
-          </a:xfrm>
-          <a:prstGeom prst="rect">
-            <a:avLst/>
-          </a:prstGeom>
-          <a:noFill/>
-        </p:spPr>
-        <p:txBody>
-          <a:bodyPr wrap="none" lIns="18288" rIns="18288" tIns="18288" bIns="18288" anchor="ctr">
-            <a:spAutoFit/>
-          </a:bodyPr>
-          <a:lstStyle/>
-          <a:p>
-            <a:pPr algn="ctr"/>
-            <a:r>
-              <a:rPr sz="720" b="1">
-                <a:solidFill>
-                  <a:srgbClr val="C38A20"/>
-                </a:solidFill>
-                <a:latin typeface="Aptos"/>
-              </a:rPr>
-              <a:t>composition shift</a:t>
-            </a:r>
-          </a:p>
-        </p:txBody>
-      </p:sp>
-      <p:sp>
-        <p:nvSpPr>
-          <p:cNvPr id="110" name="TextBox 109"/>
-          <p:cNvSpPr txBox="1"/>
-          <p:nvPr/>
-        </p:nvSpPr>
-        <p:spPr>
-          <a:xfrm>
-            <a:off x="347472" y="5852160"/>
-            <a:ext cx="10241280" cy="201168"/>
-          </a:xfrm>
-          <a:prstGeom prst="rect">
-            <a:avLst/>
-          </a:prstGeom>
-          <a:noFill/>
-        </p:spPr>
-        <p:txBody>
-          <a:bodyPr wrap="none" lIns="18288" rIns="18288" tIns="18288" bIns="18288" anchor="ctr">
-            <a:spAutoFit/>
-          </a:bodyPr>
-          <a:lstStyle/>
-          <a:p>
-            <a:pPr algn="ctr"/>
-            <a:r>
-              <a:rPr sz="720" b="0">
-                <a:solidFill>
-                  <a:srgbClr val="5E6875"/>
-                </a:solidFill>
-                <a:latin typeface="Aptos"/>
-              </a:rPr>
-              <a:t>Task-weighted window means. Two incomplete Waves are omitted; W23–24 are shown separately as late difficult-task stress. Active time excludes orchestration wait, environment preparation, external verification, infrastructure recovery, and post-task knowledge maintenance.</a:t>
             </a:r>
           </a:p>
         </p:txBody>
